--- a/嘉中201探究短講_科學邊界與貨物崇拜_志文調色版.pptx
+++ b/嘉中201探究短講_科學邊界與貨物崇拜_志文調色版.pptx
@@ -4,22 +4,25 @@
   <p:sldMasterIdLst>
     <p:sldMasterId id="2147483648" r:id="rId1"/>
   </p:sldMasterIdLst>
+  <p:notesMasterIdLst>
+    <p:notesMasterId r:id="rId15"/>
+  </p:notesMasterIdLst>
   <p:sldIdLst>
-    <p:sldId id="256" r:id="rId7"/>
-    <p:sldId id="257" r:id="rId9"/>
-    <p:sldId id="258" r:id="rId10"/>
-    <p:sldId id="259" r:id="rId11"/>
-    <p:sldId id="260" r:id="rId12"/>
-    <p:sldId id="261" r:id="rId13"/>
-    <p:sldId id="262" r:id="rId14"/>
-    <p:sldId id="263" r:id="rId15"/>
-    <p:sldId id="264" r:id="rId16"/>
-    <p:sldId id="265" r:id="rId17"/>
-    <p:sldId id="266" r:id="rId18"/>
-    <p:sldId id="267" r:id="rId19"/>
-    <p:sldId id="268" r:id="rId20"/>
+    <p:sldId id="256" r:id="rId2"/>
+    <p:sldId id="257" r:id="rId3"/>
+    <p:sldId id="258" r:id="rId4"/>
+    <p:sldId id="259" r:id="rId5"/>
+    <p:sldId id="260" r:id="rId6"/>
+    <p:sldId id="261" r:id="rId7"/>
+    <p:sldId id="262" r:id="rId8"/>
+    <p:sldId id="263" r:id="rId9"/>
+    <p:sldId id="264" r:id="rId10"/>
+    <p:sldId id="265" r:id="rId11"/>
+    <p:sldId id="266" r:id="rId12"/>
+    <p:sldId id="267" r:id="rId13"/>
+    <p:sldId id="268" r:id="rId14"/>
   </p:sldIdLst>
-  <p:sldSz cx="12192000" cy="6858000" type="screen4x3"/>
+  <p:sldSz cx="12192000" cy="6858000"/>
   <p:notesSz cx="6858000" cy="9144000"/>
   <p:defaultTextStyle>
     <a:defPPr>
@@ -116,11 +119,27 @@
       </a:defRPr>
     </a:lvl9pPr>
   </p:defaultTextStyle>
+  <p:extLst>
+    <p:ext uri="{EFAFB233-063F-42B5-8137-9DF3F51BA10A}">
+      <p15:sldGuideLst xmlns:p15="http://schemas.microsoft.com/office/powerpoint/2012/main">
+        <p15:guide id="1" orient="horz" pos="2160">
+          <p15:clr>
+            <a:srgbClr val="A4A3A4"/>
+          </p15:clr>
+        </p15:guide>
+        <p15:guide id="2" pos="2880">
+          <p15:clr>
+            <a:srgbClr val="A4A3A4"/>
+          </p15:clr>
+        </p15:guide>
+      </p15:sldGuideLst>
+    </p:ext>
+  </p:extLst>
 </p:presentation>
 </file>
 
 <file path=ppt/notesMasters/notesMaster1.xml><?xml version="1.0" encoding="utf-8"?>
-<p:notesMaster xmlns:a="http://schemas.openxmlformats.org/drawingml/2006/main" xmlns:p="http://schemas.openxmlformats.org/presentationml/2006/main" xmlns:r="http://schemas.openxmlformats.org/officeDocument/2006/relationships">
+<p:notesMaster xmlns:a="http://schemas.openxmlformats.org/drawingml/2006/main" xmlns:r="http://schemas.openxmlformats.org/officeDocument/2006/relationships" xmlns:p="http://schemas.openxmlformats.org/presentationml/2006/main">
   <p:cSld>
     <p:bg>
       <p:bgRef idx="1001">
@@ -141,241 +160,16 @@
           <a:chExt cx="0" cy="0"/>
         </a:xfrm>
       </p:grpSpPr>
-      <p:sp>
-        <p:nvSpPr>
-          <p:cNvPr id="2" name="Header Placeholder 1"/>
-          <p:cNvSpPr>
-            <a:spLocks noGrp="1"/>
-          </p:cNvSpPr>
-          <p:nvPr>
-            <p:ph type="hdr" sz="quarter"/>
-          </p:nvPr>
-        </p:nvSpPr>
-        <p:spPr>
-          <a:xfrm>
-            <a:off x="0" y="0"/>
-            <a:ext cx="2971800" cy="457200"/>
-          </a:xfrm>
-          <a:prstGeom prst="rect">
-            <a:avLst/>
-          </a:prstGeom>
-        </p:spPr>
-        <p:txBody>
-          <a:bodyPr vert="horz" lIns="91440" tIns="45720" rIns="91440" bIns="45720" rtlCol="0"/>
-          <a:lstStyle>
-            <a:lvl1pPr algn="l">
-              <a:defRPr sz="1200"/>
-            </a:lvl1pPr>
-          </a:lstStyle>
-          <a:p>
-            <a:endParaRPr lang="en-US"/>
-          </a:p>
-        </p:txBody>
-      </p:sp>
-      <p:sp>
-        <p:nvSpPr>
-          <p:cNvPr id="3" name="Date Placeholder 2"/>
-          <p:cNvSpPr>
-            <a:spLocks noGrp="1"/>
-          </p:cNvSpPr>
-          <p:nvPr>
-            <p:ph type="dt" idx="1"/>
-          </p:nvPr>
-        </p:nvSpPr>
-        <p:spPr>
-          <a:xfrm>
-            <a:off x="3884613" y="0"/>
-            <a:ext cx="2971800" cy="457200"/>
-          </a:xfrm>
-          <a:prstGeom prst="rect">
-            <a:avLst/>
-          </a:prstGeom>
-        </p:spPr>
-        <p:txBody>
-          <a:bodyPr vert="horz" lIns="91440" tIns="45720" rIns="91440" bIns="45720" rtlCol="0"/>
-          <a:lstStyle>
-            <a:lvl1pPr algn="r">
-              <a:defRPr sz="1200"/>
-            </a:lvl1pPr>
-          </a:lstStyle>
-          <a:p>
-            <a:fld id="{0F89C1C7-3DCD-1040-A9CF-14679D8B5DDD}" type="datetimeFigureOut">
-              <a:rPr lang="en-US" smtClean="0"/>
-              <a:t>10/17/16</a:t>
-            </a:fld>
-            <a:endParaRPr lang="en-US"/>
-          </a:p>
-        </p:txBody>
-      </p:sp>
-      <p:sp>
-        <p:nvSpPr>
-          <p:cNvPr id="4" name="Slide Image Placeholder 3"/>
-          <p:cNvSpPr>
-            <a:spLocks noGrp="1" noRot="1" noChangeAspect="1"/>
-          </p:cNvSpPr>
-          <p:nvPr>
-            <p:ph type="sldImg" idx="2"/>
-          </p:nvPr>
-        </p:nvSpPr>
-        <p:spPr>
-          <a:xfrm>
-            <a:off x="1143000" y="685800"/>
-            <a:ext cx="4572000" cy="3429000"/>
-          </a:xfrm>
-          <a:prstGeom prst="rect">
-            <a:avLst/>
-          </a:prstGeom>
-          <a:noFill/>
-          <a:ln w="12700">
-            <a:solidFill>
-              <a:prstClr val="black"/>
-            </a:solidFill>
-          </a:ln>
-        </p:spPr>
-        <p:txBody>
-          <a:bodyPr vert="horz" lIns="91440" tIns="45720" rIns="91440" bIns="45720" rtlCol="0" anchor="ctr"/>
-          <a:lstStyle/>
-          <a:p>
-            <a:endParaRPr lang="en-US"/>
-          </a:p>
-        </p:txBody>
-      </p:sp>
-      <p:sp>
-        <p:nvSpPr>
-          <p:cNvPr id="5" name="Notes Placeholder 4"/>
-          <p:cNvSpPr>
-            <a:spLocks noGrp="1"/>
-          </p:cNvSpPr>
-          <p:nvPr>
-            <p:ph type="body" sz="quarter" idx="3"/>
-          </p:nvPr>
-        </p:nvSpPr>
-        <p:spPr>
-          <a:xfrm>
-            <a:off x="685800" y="4343400"/>
-            <a:ext cx="5486400" cy="4114800"/>
-          </a:xfrm>
-          <a:prstGeom prst="rect">
-            <a:avLst/>
-          </a:prstGeom>
-        </p:spPr>
-        <p:txBody>
-          <a:bodyPr vert="horz" lIns="91440" tIns="45720" rIns="91440" bIns="45720" rtlCol="0"/>
-          <a:lstStyle/>
-          <a:p>
-            <a:pPr lvl="0"/>
-            <a:r>
-              <a:rPr lang="en-US" smtClean="0"/>
-              <a:t>Click to edit Master text styles</a:t>
-            </a:r>
-          </a:p>
-          <a:p>
-            <a:pPr lvl="1"/>
-            <a:r>
-              <a:rPr lang="en-US" smtClean="0"/>
-              <a:t>Second level</a:t>
-            </a:r>
-          </a:p>
-          <a:p>
-            <a:pPr lvl="2"/>
-            <a:r>
-              <a:rPr lang="en-US" smtClean="0"/>
-              <a:t>Third level</a:t>
-            </a:r>
-          </a:p>
-          <a:p>
-            <a:pPr lvl="3"/>
-            <a:r>
-              <a:rPr lang="en-US" smtClean="0"/>
-              <a:t>Fourth level</a:t>
-            </a:r>
-          </a:p>
-          <a:p>
-            <a:pPr lvl="4"/>
-            <a:r>
-              <a:rPr lang="en-US" smtClean="0"/>
-              <a:t>Fifth level</a:t>
-            </a:r>
-            <a:endParaRPr lang="en-US"/>
-          </a:p>
-        </p:txBody>
-      </p:sp>
-      <p:sp>
-        <p:nvSpPr>
-          <p:cNvPr id="6" name="Footer Placeholder 5"/>
-          <p:cNvSpPr>
-            <a:spLocks noGrp="1"/>
-          </p:cNvSpPr>
-          <p:nvPr>
-            <p:ph type="ftr" sz="quarter" idx="4"/>
-          </p:nvPr>
-        </p:nvSpPr>
-        <p:spPr>
-          <a:xfrm>
-            <a:off x="0" y="8685213"/>
-            <a:ext cx="2971800" cy="457200"/>
-          </a:xfrm>
-          <a:prstGeom prst="rect">
-            <a:avLst/>
-          </a:prstGeom>
-        </p:spPr>
-        <p:txBody>
-          <a:bodyPr vert="horz" lIns="91440" tIns="45720" rIns="91440" bIns="45720" rtlCol="0" anchor="b"/>
-          <a:lstStyle>
-            <a:lvl1pPr algn="l">
-              <a:defRPr sz="1200"/>
-            </a:lvl1pPr>
-          </a:lstStyle>
-          <a:p>
-            <a:endParaRPr lang="en-US"/>
-          </a:p>
-        </p:txBody>
-      </p:sp>
-      <p:sp>
-        <p:nvSpPr>
-          <p:cNvPr id="7" name="Slide Number Placeholder 6"/>
-          <p:cNvSpPr>
-            <a:spLocks noGrp="1"/>
-          </p:cNvSpPr>
-          <p:nvPr>
-            <p:ph type="sldNum" sz="quarter" idx="5"/>
-          </p:nvPr>
-        </p:nvSpPr>
-        <p:spPr>
-          <a:xfrm>
-            <a:off x="3884613" y="8685213"/>
-            <a:ext cx="2971800" cy="457200"/>
-          </a:xfrm>
-          <a:prstGeom prst="rect">
-            <a:avLst/>
-          </a:prstGeom>
-        </p:spPr>
-        <p:txBody>
-          <a:bodyPr vert="horz" lIns="91440" tIns="45720" rIns="91440" bIns="45720" rtlCol="0" anchor="b"/>
-          <a:lstStyle>
-            <a:lvl1pPr algn="r">
-              <a:defRPr sz="1200"/>
-            </a:lvl1pPr>
-          </a:lstStyle>
-          <a:p>
-            <a:fld id="{BB5E49A5-4136-284D-997B-48E1D791AD67}" type="slidenum">
-              <a:rPr lang="en-US" smtClean="0"/>
-              <a:t>‹#›</a:t>
-            </a:fld>
-            <a:endParaRPr lang="en-US"/>
-          </a:p>
-        </p:txBody>
-      </p:sp>
     </p:spTree>
     <p:extLst>
       <p:ext uri="{BB962C8B-B14F-4D97-AF65-F5344CB8AC3E}">
-        <p14:creationId xmlns:p14="http://schemas.microsoft.com/office/powerpoint/2010/main" val="2623252185"/>
+        <p14:creationId xmlns:p14="http://schemas.microsoft.com/office/powerpoint/2010/main" val="3284060467"/>
       </p:ext>
     </p:extLst>
   </p:cSld>
   <p:clrMap bg1="lt1" tx1="dk1" bg2="lt2" tx2="dk2" accent1="accent1" accent2="accent2" accent3="accent3" accent4="accent4" accent5="accent5" accent6="accent6" hlink="hlink" folHlink="folHlink"/>
   <p:notesStyle>
-    <a:lvl1pPr marL="0" algn="l" defTabSz="457200" rtl="0" eaLnBrk="1" latinLnBrk="0" hangingPunct="1">
+    <a:lvl1pPr marL="0" algn="l" defTabSz="914400" rtl="0" eaLnBrk="1" latinLnBrk="0" hangingPunct="1">
       <a:defRPr sz="1200" kern="1200">
         <a:solidFill>
           <a:schemeClr val="tx1"/>
@@ -385,7 +179,7 @@
         <a:cs typeface="+mn-cs"/>
       </a:defRPr>
     </a:lvl1pPr>
-    <a:lvl2pPr marL="457200" algn="l" defTabSz="457200" rtl="0" eaLnBrk="1" latinLnBrk="0" hangingPunct="1">
+    <a:lvl2pPr marL="457200" algn="l" defTabSz="914400" rtl="0" eaLnBrk="1" latinLnBrk="0" hangingPunct="1">
       <a:defRPr sz="1200" kern="1200">
         <a:solidFill>
           <a:schemeClr val="tx1"/>
@@ -395,7 +189,7 @@
         <a:cs typeface="+mn-cs"/>
       </a:defRPr>
     </a:lvl2pPr>
-    <a:lvl3pPr marL="914400" algn="l" defTabSz="457200" rtl="0" eaLnBrk="1" latinLnBrk="0" hangingPunct="1">
+    <a:lvl3pPr marL="914400" algn="l" defTabSz="914400" rtl="0" eaLnBrk="1" latinLnBrk="0" hangingPunct="1">
       <a:defRPr sz="1200" kern="1200">
         <a:solidFill>
           <a:schemeClr val="tx1"/>
@@ -405,7 +199,7 @@
         <a:cs typeface="+mn-cs"/>
       </a:defRPr>
     </a:lvl3pPr>
-    <a:lvl4pPr marL="1371600" algn="l" defTabSz="457200" rtl="0" eaLnBrk="1" latinLnBrk="0" hangingPunct="1">
+    <a:lvl4pPr marL="1371600" algn="l" defTabSz="914400" rtl="0" eaLnBrk="1" latinLnBrk="0" hangingPunct="1">
       <a:defRPr sz="1200" kern="1200">
         <a:solidFill>
           <a:schemeClr val="tx1"/>
@@ -415,7 +209,7 @@
         <a:cs typeface="+mn-cs"/>
       </a:defRPr>
     </a:lvl4pPr>
-    <a:lvl5pPr marL="1828800" algn="l" defTabSz="457200" rtl="0" eaLnBrk="1" latinLnBrk="0" hangingPunct="1">
+    <a:lvl5pPr marL="1828800" algn="l" defTabSz="914400" rtl="0" eaLnBrk="1" latinLnBrk="0" hangingPunct="1">
       <a:defRPr sz="1200" kern="1200">
         <a:solidFill>
           <a:schemeClr val="tx1"/>
@@ -425,7 +219,7 @@
         <a:cs typeface="+mn-cs"/>
       </a:defRPr>
     </a:lvl5pPr>
-    <a:lvl6pPr marL="2286000" algn="l" defTabSz="457200" rtl="0" eaLnBrk="1" latinLnBrk="0" hangingPunct="1">
+    <a:lvl6pPr marL="2286000" algn="l" defTabSz="914400" rtl="0" eaLnBrk="1" latinLnBrk="0" hangingPunct="1">
       <a:defRPr sz="1200" kern="1200">
         <a:solidFill>
           <a:schemeClr val="tx1"/>
@@ -435,7 +229,7 @@
         <a:cs typeface="+mn-cs"/>
       </a:defRPr>
     </a:lvl6pPr>
-    <a:lvl7pPr marL="2743200" algn="l" defTabSz="457200" rtl="0" eaLnBrk="1" latinLnBrk="0" hangingPunct="1">
+    <a:lvl7pPr marL="2743200" algn="l" defTabSz="914400" rtl="0" eaLnBrk="1" latinLnBrk="0" hangingPunct="1">
       <a:defRPr sz="1200" kern="1200">
         <a:solidFill>
           <a:schemeClr val="tx1"/>
@@ -445,7 +239,7 @@
         <a:cs typeface="+mn-cs"/>
       </a:defRPr>
     </a:lvl7pPr>
-    <a:lvl8pPr marL="3200400" algn="l" defTabSz="457200" rtl="0" eaLnBrk="1" latinLnBrk="0" hangingPunct="1">
+    <a:lvl8pPr marL="3200400" algn="l" defTabSz="914400" rtl="0" eaLnBrk="1" latinLnBrk="0" hangingPunct="1">
       <a:defRPr sz="1200" kern="1200">
         <a:solidFill>
           <a:schemeClr val="tx1"/>
@@ -455,7 +249,7 @@
         <a:cs typeface="+mn-cs"/>
       </a:defRPr>
     </a:lvl8pPr>
-    <a:lvl9pPr marL="3657600" algn="l" defTabSz="457200" rtl="0" eaLnBrk="1" latinLnBrk="0" hangingPunct="1">
+    <a:lvl9pPr marL="3657600" algn="l" defTabSz="914400" rtl="0" eaLnBrk="1" latinLnBrk="0" hangingPunct="1">
       <a:defRPr sz="1200" kern="1200">
         <a:solidFill>
           <a:schemeClr val="tx1"/>
@@ -470,7 +264,7 @@
 </file>
 
 <file path=ppt/notesSlides/notesSlide1.xml><?xml version="1.0" encoding="utf-8"?>
-<p:notes xmlns:a="http://schemas.openxmlformats.org/drawingml/2006/main" xmlns:p="http://schemas.openxmlformats.org/presentationml/2006/main" xmlns:r="http://schemas.openxmlformats.org/officeDocument/2006/relationships">
+<p:notes xmlns:a="http://schemas.openxmlformats.org/drawingml/2006/main" xmlns:r="http://schemas.openxmlformats.org/officeDocument/2006/relationships" xmlns:p="http://schemas.openxmlformats.org/presentationml/2006/main">
   <p:cSld>
     <p:spTree>
       <p:nvGrpSpPr>
@@ -490,48 +284,48 @@
         <p:nvSpPr>
           <p:cNvPr id="2" name="Slide Image Placeholder 1"/>
           <p:cNvSpPr>
+            <a:spLocks noGrp="1" noRot="1" noChangeAspect="1"/>
+          </p:cNvSpPr>
+          <p:nvPr>
+            <p:ph type="sldImg" idx="2"/>
+          </p:nvPr>
+        </p:nvSpPr>
+        <p:spPr/>
+      </p:sp>
+      <p:sp>
+        <p:nvSpPr>
+          <p:cNvPr id="3" name="Notes Placeholder 2"/>
+          <p:cNvSpPr>
             <a:spLocks noGrp="1"/>
           </p:cNvSpPr>
           <p:nvPr>
-            <p:ph type="sldImg" idx="2"/>
+            <p:ph type="body" sz="quarter" idx="3"/>
           </p:nvPr>
         </p:nvSpPr>
         <p:spPr/>
-      </p:sp>
-      <p:sp>
-        <p:nvSpPr>
-          <p:cNvPr id="3" name="Notes Placeholder 2"/>
+        <p:txBody>
+          <a:bodyPr/>
+          <a:lstStyle/>
+          <a:p>
+            <a:r>
+              <a:t>【開場破冰 · 1.5分鐘】</a:t>
+            </a:r>
+          </a:p>
+          <a:p>
+            <a:r>
+              <a:t>各位 201 班同學好！做探究實作時，有圖表、有數據就是科學嗎？今天我們用 15 分鐘，揭開一場跨越 2000 年的真假科學冒險。</a:t>
+            </a:r>
+          </a:p>
+        </p:txBody>
+      </p:sp>
+      <p:sp>
+        <p:nvSpPr>
+          <p:cNvPr id="4" name="Slide Number Placeholder 3"/>
           <p:cNvSpPr>
             <a:spLocks noGrp="1"/>
           </p:cNvSpPr>
           <p:nvPr>
-            <p:ph type="body" idx="3" sz="quarter"/>
-          </p:nvPr>
-        </p:nvSpPr>
-        <p:spPr/>
-        <p:txBody>
-          <a:bodyPr/>
-          <a:lstStyle/>
-          <a:p>
-            <a:r>
-              <a:t>【開場破冰 · 1.5分鐘】</a:t>
-            </a:r>
-          </a:p>
-          <a:p>
-            <a:r>
-              <a:t>各位 201 班同學好！做探究實作時，有圖表、有數據就是科學嗎？今天我們用 15 分鐘，揭開一場跨越 2000 年的真假科學冒險。</a:t>
-            </a:r>
-          </a:p>
-        </p:txBody>
-      </p:sp>
-      <p:sp>
-        <p:nvSpPr>
-          <p:cNvPr id="4" name="Slide Number Placeholder 3"/>
-          <p:cNvSpPr>
-            <a:spLocks noGrp="1"/>
-          </p:cNvSpPr>
-          <p:nvPr>
-            <p:ph type="sldNum" idx="5" sz="quarter"/>
+            <p:ph type="sldNum" sz="quarter" idx="5"/>
           </p:nvPr>
         </p:nvSpPr>
         <p:spPr/>
@@ -545,7 +339,7 @@
 </file>
 
 <file path=ppt/notesSlides/notesSlide10.xml><?xml version="1.0" encoding="utf-8"?>
-<p:notes xmlns:a="http://schemas.openxmlformats.org/drawingml/2006/main" xmlns:p="http://schemas.openxmlformats.org/presentationml/2006/main" xmlns:r="http://schemas.openxmlformats.org/officeDocument/2006/relationships">
+<p:notes xmlns:a="http://schemas.openxmlformats.org/drawingml/2006/main" xmlns:r="http://schemas.openxmlformats.org/officeDocument/2006/relationships" xmlns:p="http://schemas.openxmlformats.org/presentationml/2006/main">
   <p:cSld>
     <p:spTree>
       <p:nvGrpSpPr>
@@ -565,48 +359,48 @@
         <p:nvSpPr>
           <p:cNvPr id="2" name="Slide Image Placeholder 1"/>
           <p:cNvSpPr>
+            <a:spLocks noGrp="1" noRot="1" noChangeAspect="1"/>
+          </p:cNvSpPr>
+          <p:nvPr>
+            <p:ph type="sldImg" idx="2"/>
+          </p:nvPr>
+        </p:nvSpPr>
+        <p:spPr/>
+      </p:sp>
+      <p:sp>
+        <p:nvSpPr>
+          <p:cNvPr id="3" name="Notes Placeholder 2"/>
+          <p:cNvSpPr>
             <a:spLocks noGrp="1"/>
           </p:cNvSpPr>
           <p:nvPr>
-            <p:ph type="sldImg" idx="2"/>
+            <p:ph type="body" sz="quarter" idx="3"/>
           </p:nvPr>
         </p:nvSpPr>
         <p:spPr/>
-      </p:sp>
-      <p:sp>
-        <p:nvSpPr>
-          <p:cNvPr id="3" name="Notes Placeholder 2"/>
+        <p:txBody>
+          <a:bodyPr/>
+          <a:lstStyle/>
+          <a:p>
+            <a:r>
+              <a:t>【科學光譜 · 1.5分鐘】</a:t>
+            </a:r>
+          </a:p>
+          <a:p>
+            <a:r>
+              <a:t>從反科學到正統科學。像魏格納提出大陸漂移說，一開始被嘲笑是邊緣科學，但他提出地質證據，最終進入正統科學！</a:t>
+            </a:r>
+          </a:p>
+        </p:txBody>
+      </p:sp>
+      <p:sp>
+        <p:nvSpPr>
+          <p:cNvPr id="4" name="Slide Number Placeholder 3"/>
           <p:cNvSpPr>
             <a:spLocks noGrp="1"/>
           </p:cNvSpPr>
           <p:nvPr>
-            <p:ph type="body" idx="3" sz="quarter"/>
-          </p:nvPr>
-        </p:nvSpPr>
-        <p:spPr/>
-        <p:txBody>
-          <a:bodyPr/>
-          <a:lstStyle/>
-          <a:p>
-            <a:r>
-              <a:t>【科學光譜 · 1.5分鐘】</a:t>
-            </a:r>
-          </a:p>
-          <a:p>
-            <a:r>
-              <a:t>從反科學到正統科學。像魏格納提出大陸漂移說，一開始被嘲笑是邊緣科學，但他提出地質證據，最終進入正統科學！</a:t>
-            </a:r>
-          </a:p>
-        </p:txBody>
-      </p:sp>
-      <p:sp>
-        <p:nvSpPr>
-          <p:cNvPr id="4" name="Slide Number Placeholder 3"/>
-          <p:cNvSpPr>
-            <a:spLocks noGrp="1"/>
-          </p:cNvSpPr>
-          <p:nvPr>
-            <p:ph type="sldNum" idx="5" sz="quarter"/>
+            <p:ph type="sldNum" sz="quarter" idx="5"/>
           </p:nvPr>
         </p:nvSpPr>
         <p:spPr/>
@@ -620,7 +414,7 @@
 </file>
 
 <file path=ppt/notesSlides/notesSlide11.xml><?xml version="1.0" encoding="utf-8"?>
-<p:notes xmlns:a="http://schemas.openxmlformats.org/drawingml/2006/main" xmlns:p="http://schemas.openxmlformats.org/presentationml/2006/main" xmlns:r="http://schemas.openxmlformats.org/officeDocument/2006/relationships">
+<p:notes xmlns:a="http://schemas.openxmlformats.org/drawingml/2006/main" xmlns:r="http://schemas.openxmlformats.org/officeDocument/2006/relationships" xmlns:p="http://schemas.openxmlformats.org/presentationml/2006/main">
   <p:cSld>
     <p:spTree>
       <p:nvGrpSpPr>
@@ -640,48 +434,48 @@
         <p:nvSpPr>
           <p:cNvPr id="2" name="Slide Image Placeholder 1"/>
           <p:cNvSpPr>
+            <a:spLocks noGrp="1" noRot="1" noChangeAspect="1"/>
+          </p:cNvSpPr>
+          <p:nvPr>
+            <p:ph type="sldImg" idx="2"/>
+          </p:nvPr>
+        </p:nvSpPr>
+        <p:spPr/>
+      </p:sp>
+      <p:sp>
+        <p:nvSpPr>
+          <p:cNvPr id="3" name="Notes Placeholder 2"/>
+          <p:cNvSpPr>
             <a:spLocks noGrp="1"/>
           </p:cNvSpPr>
           <p:nvPr>
-            <p:ph type="sldImg" idx="2"/>
+            <p:ph type="body" sz="quarter" idx="3"/>
           </p:nvPr>
         </p:nvSpPr>
         <p:spPr/>
-      </p:sp>
-      <p:sp>
-        <p:nvSpPr>
-          <p:cNvPr id="3" name="Notes Placeholder 2"/>
+        <p:txBody>
+          <a:bodyPr/>
+          <a:lstStyle/>
+          <a:p>
+            <a:r>
+              <a:t>【課堂大挑戰 · 2分鐘】</a:t>
+            </a:r>
+          </a:p>
+          <a:p>
+            <a:r>
+              <a:t>帶領全班搶答 4 道情境題，現場檢驗「波普爾之刀」的辨識力！</a:t>
+            </a:r>
+          </a:p>
+        </p:txBody>
+      </p:sp>
+      <p:sp>
+        <p:nvSpPr>
+          <p:cNvPr id="4" name="Slide Number Placeholder 3"/>
           <p:cNvSpPr>
             <a:spLocks noGrp="1"/>
           </p:cNvSpPr>
           <p:nvPr>
-            <p:ph type="body" idx="3" sz="quarter"/>
-          </p:nvPr>
-        </p:nvSpPr>
-        <p:spPr/>
-        <p:txBody>
-          <a:bodyPr/>
-          <a:lstStyle/>
-          <a:p>
-            <a:r>
-              <a:t>【課堂大挑戰 · 2分鐘】</a:t>
-            </a:r>
-          </a:p>
-          <a:p>
-            <a:r>
-              <a:t>帶領全班搶答 4 道情境題，現場檢驗「波普爾之刀」的辨識力！</a:t>
-            </a:r>
-          </a:p>
-        </p:txBody>
-      </p:sp>
-      <p:sp>
-        <p:nvSpPr>
-          <p:cNvPr id="4" name="Slide Number Placeholder 3"/>
-          <p:cNvSpPr>
-            <a:spLocks noGrp="1"/>
-          </p:cNvSpPr>
-          <p:nvPr>
-            <p:ph type="sldNum" idx="5" sz="quarter"/>
+            <p:ph type="sldNum" sz="quarter" idx="5"/>
           </p:nvPr>
         </p:nvSpPr>
         <p:spPr/>
@@ -695,7 +489,7 @@
 </file>
 
 <file path=ppt/notesSlides/notesSlide12.xml><?xml version="1.0" encoding="utf-8"?>
-<p:notes xmlns:a="http://schemas.openxmlformats.org/drawingml/2006/main" xmlns:p="http://schemas.openxmlformats.org/presentationml/2006/main" xmlns:r="http://schemas.openxmlformats.org/officeDocument/2006/relationships">
+<p:notes xmlns:a="http://schemas.openxmlformats.org/drawingml/2006/main" xmlns:r="http://schemas.openxmlformats.org/officeDocument/2006/relationships" xmlns:p="http://schemas.openxmlformats.org/presentationml/2006/main">
   <p:cSld>
     <p:spTree>
       <p:nvGrpSpPr>
@@ -715,48 +509,48 @@
         <p:nvSpPr>
           <p:cNvPr id="2" name="Slide Image Placeholder 1"/>
           <p:cNvSpPr>
+            <a:spLocks noGrp="1" noRot="1" noChangeAspect="1"/>
+          </p:cNvSpPr>
+          <p:nvPr>
+            <p:ph type="sldImg" idx="2"/>
+          </p:nvPr>
+        </p:nvSpPr>
+        <p:spPr/>
+      </p:sp>
+      <p:sp>
+        <p:nvSpPr>
+          <p:cNvPr id="3" name="Notes Placeholder 2"/>
+          <p:cNvSpPr>
             <a:spLocks noGrp="1"/>
           </p:cNvSpPr>
           <p:nvPr>
-            <p:ph type="sldImg" idx="2"/>
+            <p:ph type="body" sz="quarter" idx="3"/>
           </p:nvPr>
         </p:nvSpPr>
         <p:spPr/>
-      </p:sp>
-      <p:sp>
-        <p:nvSpPr>
-          <p:cNvPr id="3" name="Notes Placeholder 2"/>
+        <p:txBody>
+          <a:bodyPr/>
+          <a:lstStyle/>
+          <a:p>
+            <a:r>
+              <a:t>【雙稜鏡交付 · 1.5分鐘】</a:t>
+            </a:r>
+          </a:p>
+          <a:p>
+            <a:r>
+              <a:t>下課前交給同學的隨身武器：波普爾之鏡照對手，費曼之鏡照自己。</a:t>
+            </a:r>
+          </a:p>
+        </p:txBody>
+      </p:sp>
+      <p:sp>
+        <p:nvSpPr>
+          <p:cNvPr id="4" name="Slide Number Placeholder 3"/>
           <p:cNvSpPr>
             <a:spLocks noGrp="1"/>
           </p:cNvSpPr>
           <p:nvPr>
-            <p:ph type="body" idx="3" sz="quarter"/>
-          </p:nvPr>
-        </p:nvSpPr>
-        <p:spPr/>
-        <p:txBody>
-          <a:bodyPr/>
-          <a:lstStyle/>
-          <a:p>
-            <a:r>
-              <a:t>【雙稜鏡交付 · 1.5分鐘】</a:t>
-            </a:r>
-          </a:p>
-          <a:p>
-            <a:r>
-              <a:t>下課前交給同學的隨身武器：波普爾之鏡照對手，費曼之鏡照自己。</a:t>
-            </a:r>
-          </a:p>
-        </p:txBody>
-      </p:sp>
-      <p:sp>
-        <p:nvSpPr>
-          <p:cNvPr id="4" name="Slide Number Placeholder 3"/>
-          <p:cNvSpPr>
-            <a:spLocks noGrp="1"/>
-          </p:cNvSpPr>
-          <p:nvPr>
-            <p:ph type="sldNum" idx="5" sz="quarter"/>
+            <p:ph type="sldNum" sz="quarter" idx="5"/>
           </p:nvPr>
         </p:nvSpPr>
         <p:spPr/>
@@ -770,7 +564,7 @@
 </file>
 
 <file path=ppt/notesSlides/notesSlide13.xml><?xml version="1.0" encoding="utf-8"?>
-<p:notes xmlns:a="http://schemas.openxmlformats.org/drawingml/2006/main" xmlns:p="http://schemas.openxmlformats.org/presentationml/2006/main" xmlns:r="http://schemas.openxmlformats.org/officeDocument/2006/relationships">
+<p:notes xmlns:a="http://schemas.openxmlformats.org/drawingml/2006/main" xmlns:r="http://schemas.openxmlformats.org/officeDocument/2006/relationships" xmlns:p="http://schemas.openxmlformats.org/presentationml/2006/main">
   <p:cSld>
     <p:spTree>
       <p:nvGrpSpPr>
@@ -790,48 +584,48 @@
         <p:nvSpPr>
           <p:cNvPr id="2" name="Slide Image Placeholder 1"/>
           <p:cNvSpPr>
+            <a:spLocks noGrp="1" noRot="1" noChangeAspect="1"/>
+          </p:cNvSpPr>
+          <p:nvPr>
+            <p:ph type="sldImg" idx="2"/>
+          </p:nvPr>
+        </p:nvSpPr>
+        <p:spPr/>
+      </p:sp>
+      <p:sp>
+        <p:nvSpPr>
+          <p:cNvPr id="3" name="Notes Placeholder 2"/>
+          <p:cNvSpPr>
             <a:spLocks noGrp="1"/>
           </p:cNvSpPr>
           <p:nvPr>
-            <p:ph type="sldImg" idx="2"/>
+            <p:ph type="body" sz="quarter" idx="3"/>
           </p:nvPr>
         </p:nvSpPr>
         <p:spPr/>
-      </p:sp>
-      <p:sp>
-        <p:nvSpPr>
-          <p:cNvPr id="3" name="Notes Placeholder 2"/>
+        <p:txBody>
+          <a:bodyPr/>
+          <a:lstStyle/>
+          <a:p>
+            <a:r>
+              <a:t>【結語收束 · 1分鐘】</a:t>
+            </a:r>
+          </a:p>
+          <a:p>
+            <a:r>
+              <a:t>祝嘉中 201 每位同學今年都能做一個誠實、敏銳、敢於修正自己的探究者。謝謝大家！</a:t>
+            </a:r>
+          </a:p>
+        </p:txBody>
+      </p:sp>
+      <p:sp>
+        <p:nvSpPr>
+          <p:cNvPr id="4" name="Slide Number Placeholder 3"/>
           <p:cNvSpPr>
             <a:spLocks noGrp="1"/>
           </p:cNvSpPr>
           <p:nvPr>
-            <p:ph type="body" idx="3" sz="quarter"/>
-          </p:nvPr>
-        </p:nvSpPr>
-        <p:spPr/>
-        <p:txBody>
-          <a:bodyPr/>
-          <a:lstStyle/>
-          <a:p>
-            <a:r>
-              <a:t>【結語收束 · 1分鐘】</a:t>
-            </a:r>
-          </a:p>
-          <a:p>
-            <a:r>
-              <a:t>祝嘉中 201 每位同學今年都能做一個誠實、敏銳、敢於修正自己的探究者。謝謝大家！</a:t>
-            </a:r>
-          </a:p>
-        </p:txBody>
-      </p:sp>
-      <p:sp>
-        <p:nvSpPr>
-          <p:cNvPr id="4" name="Slide Number Placeholder 3"/>
-          <p:cNvSpPr>
-            <a:spLocks noGrp="1"/>
-          </p:cNvSpPr>
-          <p:nvPr>
-            <p:ph type="sldNum" idx="5" sz="quarter"/>
+            <p:ph type="sldNum" sz="quarter" idx="5"/>
           </p:nvPr>
         </p:nvSpPr>
         <p:spPr/>
@@ -845,7 +639,7 @@
 </file>
 
 <file path=ppt/notesSlides/notesSlide2.xml><?xml version="1.0" encoding="utf-8"?>
-<p:notes xmlns:a="http://schemas.openxmlformats.org/drawingml/2006/main" xmlns:p="http://schemas.openxmlformats.org/presentationml/2006/main" xmlns:r="http://schemas.openxmlformats.org/officeDocument/2006/relationships">
+<p:notes xmlns:a="http://schemas.openxmlformats.org/drawingml/2006/main" xmlns:r="http://schemas.openxmlformats.org/officeDocument/2006/relationships" xmlns:p="http://schemas.openxmlformats.org/presentationml/2006/main">
   <p:cSld>
     <p:spTree>
       <p:nvGrpSpPr>
@@ -865,48 +659,48 @@
         <p:nvSpPr>
           <p:cNvPr id="2" name="Slide Image Placeholder 1"/>
           <p:cNvSpPr>
+            <a:spLocks noGrp="1" noRot="1" noChangeAspect="1"/>
+          </p:cNvSpPr>
+          <p:nvPr>
+            <p:ph type="sldImg" idx="2"/>
+          </p:nvPr>
+        </p:nvSpPr>
+        <p:spPr/>
+      </p:sp>
+      <p:sp>
+        <p:nvSpPr>
+          <p:cNvPr id="3" name="Notes Placeholder 2"/>
+          <p:cNvSpPr>
             <a:spLocks noGrp="1"/>
           </p:cNvSpPr>
           <p:nvPr>
-            <p:ph type="sldImg" idx="2"/>
+            <p:ph type="body" sz="quarter" idx="3"/>
           </p:nvPr>
         </p:nvSpPr>
         <p:spPr/>
-      </p:sp>
-      <p:sp>
-        <p:nvSpPr>
-          <p:cNvPr id="3" name="Notes Placeholder 2"/>
+        <p:txBody>
+          <a:bodyPr/>
+          <a:lstStyle/>
+          <a:p>
+            <a:r>
+              <a:t>【Hook 衝突 · 2分鐘】</a:t>
+            </a:r>
+          </a:p>
+          <a:p>
+            <a:r>
+              <a:t>請同學看大螢幕這兩個案例。左邊是名詞很高深的手環，右邊是為了分數修改數據的探究報告。誰是真正的科學？</a:t>
+            </a:r>
+          </a:p>
+        </p:txBody>
+      </p:sp>
+      <p:sp>
+        <p:nvSpPr>
+          <p:cNvPr id="4" name="Slide Number Placeholder 3"/>
           <p:cNvSpPr>
             <a:spLocks noGrp="1"/>
           </p:cNvSpPr>
           <p:nvPr>
-            <p:ph type="body" idx="3" sz="quarter"/>
-          </p:nvPr>
-        </p:nvSpPr>
-        <p:spPr/>
-        <p:txBody>
-          <a:bodyPr/>
-          <a:lstStyle/>
-          <a:p>
-            <a:r>
-              <a:t>【Hook 衝突 · 2分鐘】</a:t>
-            </a:r>
-          </a:p>
-          <a:p>
-            <a:r>
-              <a:t>請同學看大螢幕這兩個案例。左邊是名詞很高深的手環，右邊是為了分數修改數據的探究報告。誰是真正的科學？</a:t>
-            </a:r>
-          </a:p>
-        </p:txBody>
-      </p:sp>
-      <p:sp>
-        <p:nvSpPr>
-          <p:cNvPr id="4" name="Slide Number Placeholder 3"/>
-          <p:cNvSpPr>
-            <a:spLocks noGrp="1"/>
-          </p:cNvSpPr>
-          <p:nvPr>
-            <p:ph type="sldNum" idx="5" sz="quarter"/>
+            <p:ph type="sldNum" sz="quarter" idx="5"/>
           </p:nvPr>
         </p:nvSpPr>
         <p:spPr/>
@@ -920,7 +714,7 @@
 </file>
 
 <file path=ppt/notesSlides/notesSlide3.xml><?xml version="1.0" encoding="utf-8"?>
-<p:notes xmlns:a="http://schemas.openxmlformats.org/drawingml/2006/main" xmlns:p="http://schemas.openxmlformats.org/presentationml/2006/main" xmlns:r="http://schemas.openxmlformats.org/officeDocument/2006/relationships">
+<p:notes xmlns:a="http://schemas.openxmlformats.org/drawingml/2006/main" xmlns:r="http://schemas.openxmlformats.org/officeDocument/2006/relationships" xmlns:p="http://schemas.openxmlformats.org/presentationml/2006/main">
   <p:cSld>
     <p:spTree>
       <p:nvGrpSpPr>
@@ -940,48 +734,48 @@
         <p:nvSpPr>
           <p:cNvPr id="2" name="Slide Image Placeholder 1"/>
           <p:cNvSpPr>
+            <a:spLocks noGrp="1" noRot="1" noChangeAspect="1"/>
+          </p:cNvSpPr>
+          <p:nvPr>
+            <p:ph type="sldImg" idx="2"/>
+          </p:nvPr>
+        </p:nvSpPr>
+        <p:spPr/>
+      </p:sp>
+      <p:sp>
+        <p:nvSpPr>
+          <p:cNvPr id="3" name="Notes Placeholder 2"/>
+          <p:cNvSpPr>
             <a:spLocks noGrp="1"/>
           </p:cNvSpPr>
           <p:nvPr>
-            <p:ph type="sldImg" idx="2"/>
+            <p:ph type="body" sz="quarter" idx="3"/>
           </p:nvPr>
         </p:nvSpPr>
         <p:spPr/>
-      </p:sp>
-      <p:sp>
-        <p:nvSpPr>
-          <p:cNvPr id="3" name="Notes Placeholder 2"/>
+        <p:txBody>
+          <a:bodyPr/>
+          <a:lstStyle/>
+          <a:p>
+            <a:r>
+              <a:t>【GPS 導航 · 1分鐘】</a:t>
+            </a:r>
+          </a:p>
+          <a:p>
+            <a:r>
+              <a:t>帶領同學看清今天的學習路徑，從字源考古到波普爾之刀，再到費曼的照妖鏡與雙稜鏡武器。</a:t>
+            </a:r>
+          </a:p>
+        </p:txBody>
+      </p:sp>
+      <p:sp>
+        <p:nvSpPr>
+          <p:cNvPr id="4" name="Slide Number Placeholder 3"/>
           <p:cNvSpPr>
             <a:spLocks noGrp="1"/>
           </p:cNvSpPr>
           <p:nvPr>
-            <p:ph type="body" idx="3" sz="quarter"/>
-          </p:nvPr>
-        </p:nvSpPr>
-        <p:spPr/>
-        <p:txBody>
-          <a:bodyPr/>
-          <a:lstStyle/>
-          <a:p>
-            <a:r>
-              <a:t>【GPS 導航 · 1分鐘】</a:t>
-            </a:r>
-          </a:p>
-          <a:p>
-            <a:r>
-              <a:t>帶領同學看清今天的學習路徑，從字源考古到波普爾之刀，再到費曼的照妖鏡與雙稜鏡武器。</a:t>
-            </a:r>
-          </a:p>
-        </p:txBody>
-      </p:sp>
-      <p:sp>
-        <p:nvSpPr>
-          <p:cNvPr id="4" name="Slide Number Placeholder 3"/>
-          <p:cNvSpPr>
-            <a:spLocks noGrp="1"/>
-          </p:cNvSpPr>
-          <p:nvPr>
-            <p:ph type="sldNum" idx="5" sz="quarter"/>
+            <p:ph type="sldNum" sz="quarter" idx="5"/>
           </p:nvPr>
         </p:nvSpPr>
         <p:spPr/>
@@ -995,7 +789,7 @@
 </file>
 
 <file path=ppt/notesSlides/notesSlide4.xml><?xml version="1.0" encoding="utf-8"?>
-<p:notes xmlns:a="http://schemas.openxmlformats.org/drawingml/2006/main" xmlns:p="http://schemas.openxmlformats.org/presentationml/2006/main" xmlns:r="http://schemas.openxmlformats.org/officeDocument/2006/relationships">
+<p:notes xmlns:a="http://schemas.openxmlformats.org/drawingml/2006/main" xmlns:r="http://schemas.openxmlformats.org/officeDocument/2006/relationships" xmlns:p="http://schemas.openxmlformats.org/presentationml/2006/main">
   <p:cSld>
     <p:spTree>
       <p:nvGrpSpPr>
@@ -1015,48 +809,48 @@
         <p:nvSpPr>
           <p:cNvPr id="2" name="Slide Image Placeholder 1"/>
           <p:cNvSpPr>
+            <a:spLocks noGrp="1" noRot="1" noChangeAspect="1"/>
+          </p:cNvSpPr>
+          <p:nvPr>
+            <p:ph type="sldImg" idx="2"/>
+          </p:nvPr>
+        </p:nvSpPr>
+        <p:spPr/>
+      </p:sp>
+      <p:sp>
+        <p:nvSpPr>
+          <p:cNvPr id="3" name="Notes Placeholder 2"/>
+          <p:cNvSpPr>
             <a:spLocks noGrp="1"/>
           </p:cNvSpPr>
           <p:nvPr>
-            <p:ph type="sldImg" idx="2"/>
+            <p:ph type="body" sz="quarter" idx="3"/>
           </p:nvPr>
         </p:nvSpPr>
         <p:spPr/>
-      </p:sp>
-      <p:sp>
-        <p:nvSpPr>
-          <p:cNvPr id="3" name="Notes Placeholder 2"/>
+        <p:txBody>
+          <a:bodyPr/>
+          <a:lstStyle/>
+          <a:p>
+            <a:r>
+              <a:t>【字源考古 · 2分鐘】</a:t>
+            </a:r>
+          </a:p>
+          <a:p>
+            <a:r>
+              <a:t>說明科學是一套不斷演進的探索方法。亞里斯多德反對憑感覺主觀意見 Doxa；直到 1833 年才有 Scientist 這個詞。</a:t>
+            </a:r>
+          </a:p>
+        </p:txBody>
+      </p:sp>
+      <p:sp>
+        <p:nvSpPr>
+          <p:cNvPr id="4" name="Slide Number Placeholder 3"/>
           <p:cNvSpPr>
             <a:spLocks noGrp="1"/>
           </p:cNvSpPr>
           <p:nvPr>
-            <p:ph type="body" idx="3" sz="quarter"/>
-          </p:nvPr>
-        </p:nvSpPr>
-        <p:spPr/>
-        <p:txBody>
-          <a:bodyPr/>
-          <a:lstStyle/>
-          <a:p>
-            <a:r>
-              <a:t>【字源考古 · 2分鐘】</a:t>
-            </a:r>
-          </a:p>
-          <a:p>
-            <a:r>
-              <a:t>說明科學是一套不斷演進的探索方法。亞里斯多德反對憑感覺主觀意見 Doxa；直到 1833 年才有 Scientist 這個詞。</a:t>
-            </a:r>
-          </a:p>
-        </p:txBody>
-      </p:sp>
-      <p:sp>
-        <p:nvSpPr>
-          <p:cNvPr id="4" name="Slide Number Placeholder 3"/>
-          <p:cNvSpPr>
-            <a:spLocks noGrp="1"/>
-          </p:cNvSpPr>
-          <p:nvPr>
-            <p:ph type="sldNum" idx="5" sz="quarter"/>
+            <p:ph type="sldNum" sz="quarter" idx="5"/>
           </p:nvPr>
         </p:nvSpPr>
         <p:spPr/>
@@ -1070,7 +864,7 @@
 </file>
 
 <file path=ppt/notesSlides/notesSlide5.xml><?xml version="1.0" encoding="utf-8"?>
-<p:notes xmlns:a="http://schemas.openxmlformats.org/drawingml/2006/main" xmlns:p="http://schemas.openxmlformats.org/presentationml/2006/main" xmlns:r="http://schemas.openxmlformats.org/officeDocument/2006/relationships">
+<p:notes xmlns:a="http://schemas.openxmlformats.org/drawingml/2006/main" xmlns:r="http://schemas.openxmlformats.org/officeDocument/2006/relationships" xmlns:p="http://schemas.openxmlformats.org/presentationml/2006/main">
   <p:cSld>
     <p:spTree>
       <p:nvGrpSpPr>
@@ -1090,48 +884,48 @@
         <p:nvSpPr>
           <p:cNvPr id="2" name="Slide Image Placeholder 1"/>
           <p:cNvSpPr>
+            <a:spLocks noGrp="1" noRot="1" noChangeAspect="1"/>
+          </p:cNvSpPr>
+          <p:nvPr>
+            <p:ph type="sldImg" idx="2"/>
+          </p:nvPr>
+        </p:nvSpPr>
+        <p:spPr/>
+      </p:sp>
+      <p:sp>
+        <p:nvSpPr>
+          <p:cNvPr id="3" name="Notes Placeholder 2"/>
+          <p:cNvSpPr>
             <a:spLocks noGrp="1"/>
           </p:cNvSpPr>
           <p:nvPr>
-            <p:ph type="sldImg" idx="2"/>
+            <p:ph type="body" sz="quarter" idx="3"/>
           </p:nvPr>
         </p:nvSpPr>
         <p:spPr/>
-      </p:sp>
-      <p:sp>
-        <p:nvSpPr>
-          <p:cNvPr id="3" name="Notes Placeholder 2"/>
+        <p:txBody>
+          <a:bodyPr/>
+          <a:lstStyle/>
+          <a:p>
+            <a:r>
+              <a:t>【波普爾分界 · 2.5分鐘】</a:t>
+            </a:r>
+          </a:p>
+          <a:p>
+            <a:r>
+              <a:t>核心是可證偽性。文學藝術是非科學，不可證偽但有價值；偽科學不可證偽卻假冒科學。</a:t>
+            </a:r>
+          </a:p>
+        </p:txBody>
+      </p:sp>
+      <p:sp>
+        <p:nvSpPr>
+          <p:cNvPr id="4" name="Slide Number Placeholder 3"/>
           <p:cNvSpPr>
             <a:spLocks noGrp="1"/>
           </p:cNvSpPr>
           <p:nvPr>
-            <p:ph type="body" idx="3" sz="quarter"/>
-          </p:nvPr>
-        </p:nvSpPr>
-        <p:spPr/>
-        <p:txBody>
-          <a:bodyPr/>
-          <a:lstStyle/>
-          <a:p>
-            <a:r>
-              <a:t>【波普爾分界 · 2.5分鐘】</a:t>
-            </a:r>
-          </a:p>
-          <a:p>
-            <a:r>
-              <a:t>核心是可證偽性。文學藝術是非科學，不可證偽但有價值；偽科學不可證偽卻假冒科學。</a:t>
-            </a:r>
-          </a:p>
-        </p:txBody>
-      </p:sp>
-      <p:sp>
-        <p:nvSpPr>
-          <p:cNvPr id="4" name="Slide Number Placeholder 3"/>
-          <p:cNvSpPr>
-            <a:spLocks noGrp="1"/>
-          </p:cNvSpPr>
-          <p:nvPr>
-            <p:ph type="sldNum" idx="5" sz="quarter"/>
+            <p:ph type="sldNum" sz="quarter" idx="5"/>
           </p:nvPr>
         </p:nvSpPr>
         <p:spPr/>
@@ -1145,7 +939,7 @@
 </file>
 
 <file path=ppt/notesSlides/notesSlide6.xml><?xml version="1.0" encoding="utf-8"?>
-<p:notes xmlns:a="http://schemas.openxmlformats.org/drawingml/2006/main" xmlns:p="http://schemas.openxmlformats.org/presentationml/2006/main" xmlns:r="http://schemas.openxmlformats.org/officeDocument/2006/relationships">
+<p:notes xmlns:a="http://schemas.openxmlformats.org/drawingml/2006/main" xmlns:r="http://schemas.openxmlformats.org/officeDocument/2006/relationships" xmlns:p="http://schemas.openxmlformats.org/presentationml/2006/main">
   <p:cSld>
     <p:spTree>
       <p:nvGrpSpPr>
@@ -1165,48 +959,48 @@
         <p:nvSpPr>
           <p:cNvPr id="2" name="Slide Image Placeholder 1"/>
           <p:cNvSpPr>
+            <a:spLocks noGrp="1" noRot="1" noChangeAspect="1"/>
+          </p:cNvSpPr>
+          <p:nvPr>
+            <p:ph type="sldImg" idx="2"/>
+          </p:nvPr>
+        </p:nvSpPr>
+        <p:spPr/>
+      </p:sp>
+      <p:sp>
+        <p:nvSpPr>
+          <p:cNvPr id="3" name="Notes Placeholder 2"/>
+          <p:cNvSpPr>
             <a:spLocks noGrp="1"/>
           </p:cNvSpPr>
           <p:nvPr>
-            <p:ph type="sldImg" idx="2"/>
+            <p:ph type="body" sz="quarter" idx="3"/>
           </p:nvPr>
         </p:nvSpPr>
         <p:spPr/>
-      </p:sp>
-      <p:sp>
-        <p:nvSpPr>
-          <p:cNvPr id="3" name="Notes Placeholder 2"/>
+        <p:txBody>
+          <a:bodyPr/>
+          <a:lstStyle/>
+          <a:p>
+            <a:r>
+              <a:t>【黑天鵝實驗 · 1.5分鐘】</a:t>
+            </a:r>
+          </a:p>
+          <a:p>
+            <a:r>
+              <a:t>歸納法的極限：你看了 100 萬隻白天鵝都不能證明理論絕對正確；但澳洲的 1 隻黑天鵝就能瞬間證偽！</a:t>
+            </a:r>
+          </a:p>
+        </p:txBody>
+      </p:sp>
+      <p:sp>
+        <p:nvSpPr>
+          <p:cNvPr id="4" name="Slide Number Placeholder 3"/>
           <p:cNvSpPr>
             <a:spLocks noGrp="1"/>
           </p:cNvSpPr>
           <p:nvPr>
-            <p:ph type="body" idx="3" sz="quarter"/>
-          </p:nvPr>
-        </p:nvSpPr>
-        <p:spPr/>
-        <p:txBody>
-          <a:bodyPr/>
-          <a:lstStyle/>
-          <a:p>
-            <a:r>
-              <a:t>【黑天鵝實驗 · 1.5分鐘】</a:t>
-            </a:r>
-          </a:p>
-          <a:p>
-            <a:r>
-              <a:t>歸納法的極限：你看了 100 萬隻白天鵝都不能證明理論絕對正確；但澳洲的 1 隻黑天鵝就能瞬間證偽！</a:t>
-            </a:r>
-          </a:p>
-        </p:txBody>
-      </p:sp>
-      <p:sp>
-        <p:nvSpPr>
-          <p:cNvPr id="4" name="Slide Number Placeholder 3"/>
-          <p:cNvSpPr>
-            <a:spLocks noGrp="1"/>
-          </p:cNvSpPr>
-          <p:nvPr>
-            <p:ph type="sldNum" idx="5" sz="quarter"/>
+            <p:ph type="sldNum" sz="quarter" idx="5"/>
           </p:nvPr>
         </p:nvSpPr>
         <p:spPr/>
@@ -1220,7 +1014,7 @@
 </file>
 
 <file path=ppt/notesSlides/notesSlide7.xml><?xml version="1.0" encoding="utf-8"?>
-<p:notes xmlns:a="http://schemas.openxmlformats.org/drawingml/2006/main" xmlns:p="http://schemas.openxmlformats.org/presentationml/2006/main" xmlns:r="http://schemas.openxmlformats.org/officeDocument/2006/relationships">
+<p:notes xmlns:a="http://schemas.openxmlformats.org/drawingml/2006/main" xmlns:r="http://schemas.openxmlformats.org/officeDocument/2006/relationships" xmlns:p="http://schemas.openxmlformats.org/presentationml/2006/main">
   <p:cSld>
     <p:spTree>
       <p:nvGrpSpPr>
@@ -1240,48 +1034,48 @@
         <p:nvSpPr>
           <p:cNvPr id="2" name="Slide Image Placeholder 1"/>
           <p:cNvSpPr>
+            <a:spLocks noGrp="1" noRot="1" noChangeAspect="1"/>
+          </p:cNvSpPr>
+          <p:nvPr>
+            <p:ph type="sldImg" idx="2"/>
+          </p:nvPr>
+        </p:nvSpPr>
+        <p:spPr/>
+      </p:sp>
+      <p:sp>
+        <p:nvSpPr>
+          <p:cNvPr id="3" name="Notes Placeholder 2"/>
+          <p:cNvSpPr>
             <a:spLocks noGrp="1"/>
           </p:cNvSpPr>
           <p:nvPr>
-            <p:ph type="sldImg" idx="2"/>
+            <p:ph type="body" sz="quarter" idx="3"/>
           </p:nvPr>
         </p:nvSpPr>
         <p:spPr/>
-      </p:sp>
-      <p:sp>
-        <p:nvSpPr>
-          <p:cNvPr id="3" name="Notes Placeholder 2"/>
+        <p:txBody>
+          <a:bodyPr/>
+          <a:lstStyle/>
+          <a:p>
+            <a:r>
+              <a:t>【費曼貨物崇拜 · 2分鐘】</a:t>
+            </a:r>
+          </a:p>
+          <a:p>
+            <a:r>
+              <a:t>島民蓋竹子塔台、戴木頭耳機，為什麼飛機不來？因為形式滿分，物理缺席！研究缺少誠實，也是貨物崇拜。</a:t>
+            </a:r>
+          </a:p>
+        </p:txBody>
+      </p:sp>
+      <p:sp>
+        <p:nvSpPr>
+          <p:cNvPr id="4" name="Slide Number Placeholder 3"/>
           <p:cNvSpPr>
             <a:spLocks noGrp="1"/>
           </p:cNvSpPr>
           <p:nvPr>
-            <p:ph type="body" idx="3" sz="quarter"/>
-          </p:nvPr>
-        </p:nvSpPr>
-        <p:spPr/>
-        <p:txBody>
-          <a:bodyPr/>
-          <a:lstStyle/>
-          <a:p>
-            <a:r>
-              <a:t>【費曼貨物崇拜 · 2分鐘】</a:t>
-            </a:r>
-          </a:p>
-          <a:p>
-            <a:r>
-              <a:t>島民蓋竹子塔台、戴木頭耳機，為什麼飛機不來？因為形式滿分，物理缺席！研究缺少誠實，也是貨物崇拜。</a:t>
-            </a:r>
-          </a:p>
-        </p:txBody>
-      </p:sp>
-      <p:sp>
-        <p:nvSpPr>
-          <p:cNvPr id="4" name="Slide Number Placeholder 3"/>
-          <p:cNvSpPr>
-            <a:spLocks noGrp="1"/>
-          </p:cNvSpPr>
-          <p:nvPr>
-            <p:ph type="sldNum" idx="5" sz="quarter"/>
+            <p:ph type="sldNum" sz="quarter" idx="5"/>
           </p:nvPr>
         </p:nvSpPr>
         <p:spPr/>
@@ -1295,7 +1089,7 @@
 </file>
 
 <file path=ppt/notesSlides/notesSlide8.xml><?xml version="1.0" encoding="utf-8"?>
-<p:notes xmlns:a="http://schemas.openxmlformats.org/drawingml/2006/main" xmlns:p="http://schemas.openxmlformats.org/presentationml/2006/main" xmlns:r="http://schemas.openxmlformats.org/officeDocument/2006/relationships">
+<p:notes xmlns:a="http://schemas.openxmlformats.org/drawingml/2006/main" xmlns:r="http://schemas.openxmlformats.org/officeDocument/2006/relationships" xmlns:p="http://schemas.openxmlformats.org/presentationml/2006/main">
   <p:cSld>
     <p:spTree>
       <p:nvGrpSpPr>
@@ -1315,48 +1109,48 @@
         <p:nvSpPr>
           <p:cNvPr id="2" name="Slide Image Placeholder 1"/>
           <p:cNvSpPr>
+            <a:spLocks noGrp="1" noRot="1" noChangeAspect="1"/>
+          </p:cNvSpPr>
+          <p:nvPr>
+            <p:ph type="sldImg" idx="2"/>
+          </p:nvPr>
+        </p:nvSpPr>
+        <p:spPr/>
+      </p:sp>
+      <p:sp>
+        <p:nvSpPr>
+          <p:cNvPr id="3" name="Notes Placeholder 2"/>
+          <p:cNvSpPr>
             <a:spLocks noGrp="1"/>
           </p:cNvSpPr>
           <p:nvPr>
-            <p:ph type="sldImg" idx="2"/>
+            <p:ph type="body" sz="quarter" idx="3"/>
           </p:nvPr>
         </p:nvSpPr>
         <p:spPr/>
-      </p:sp>
-      <p:sp>
-        <p:nvSpPr>
-          <p:cNvPr id="3" name="Notes Placeholder 2"/>
+        <p:txBody>
+          <a:bodyPr/>
+          <a:lstStyle/>
+          <a:p>
+            <a:r>
+              <a:t>【密立根爬樓梯 · 2分鐘】</a:t>
+            </a:r>
+          </a:p>
+          <a:p>
+            <a:r>
+              <a:t>密立根空氣黏滯度算小了，後面的科學家測出高數值卻不敢發表，自己找理由修低！費曼第一原則：絕不欺騙自己。</a:t>
+            </a:r>
+          </a:p>
+        </p:txBody>
+      </p:sp>
+      <p:sp>
+        <p:nvSpPr>
+          <p:cNvPr id="4" name="Slide Number Placeholder 3"/>
           <p:cNvSpPr>
             <a:spLocks noGrp="1"/>
           </p:cNvSpPr>
           <p:nvPr>
-            <p:ph type="body" idx="3" sz="quarter"/>
-          </p:nvPr>
-        </p:nvSpPr>
-        <p:spPr/>
-        <p:txBody>
-          <a:bodyPr/>
-          <a:lstStyle/>
-          <a:p>
-            <a:r>
-              <a:t>【密立根爬樓梯 · 2分鐘】</a:t>
-            </a:r>
-          </a:p>
-          <a:p>
-            <a:r>
-              <a:t>密立根空氣黏滯度算小了，後面的科學家測出高數值卻不敢發表，自己找理由修低！費曼第一原則：絕不欺騙自己。</a:t>
-            </a:r>
-          </a:p>
-        </p:txBody>
-      </p:sp>
-      <p:sp>
-        <p:nvSpPr>
-          <p:cNvPr id="4" name="Slide Number Placeholder 3"/>
-          <p:cNvSpPr>
-            <a:spLocks noGrp="1"/>
-          </p:cNvSpPr>
-          <p:nvPr>
-            <p:ph type="sldNum" idx="5" sz="quarter"/>
+            <p:ph type="sldNum" sz="quarter" idx="5"/>
           </p:nvPr>
         </p:nvSpPr>
         <p:spPr/>
@@ -1370,7 +1164,7 @@
 </file>
 
 <file path=ppt/notesSlides/notesSlide9.xml><?xml version="1.0" encoding="utf-8"?>
-<p:notes xmlns:a="http://schemas.openxmlformats.org/drawingml/2006/main" xmlns:p="http://schemas.openxmlformats.org/presentationml/2006/main" xmlns:r="http://schemas.openxmlformats.org/officeDocument/2006/relationships">
+<p:notes xmlns:a="http://schemas.openxmlformats.org/drawingml/2006/main" xmlns:r="http://schemas.openxmlformats.org/officeDocument/2006/relationships" xmlns:p="http://schemas.openxmlformats.org/presentationml/2006/main">
   <p:cSld>
     <p:spTree>
       <p:nvGrpSpPr>
@@ -1390,48 +1184,48 @@
         <p:nvSpPr>
           <p:cNvPr id="2" name="Slide Image Placeholder 1"/>
           <p:cNvSpPr>
+            <a:spLocks noGrp="1" noRot="1" noChangeAspect="1"/>
+          </p:cNvSpPr>
+          <p:nvPr>
+            <p:ph type="sldImg" idx="2"/>
+          </p:nvPr>
+        </p:nvSpPr>
+        <p:spPr/>
+      </p:sp>
+      <p:sp>
+        <p:nvSpPr>
+          <p:cNvPr id="3" name="Notes Placeholder 2"/>
+          <p:cNvSpPr>
             <a:spLocks noGrp="1"/>
           </p:cNvSpPr>
           <p:nvPr>
-            <p:ph type="sldImg" idx="2"/>
+            <p:ph type="body" sz="quarter" idx="3"/>
           </p:nvPr>
         </p:nvSpPr>
         <p:spPr/>
-      </p:sp>
-      <p:sp>
-        <p:nvSpPr>
-          <p:cNvPr id="3" name="Notes Placeholder 2"/>
+        <p:txBody>
+          <a:bodyPr/>
+          <a:lstStyle/>
+          <a:p>
+            <a:r>
+              <a:t>【探究現場照妖鏡 · 2分鐘】</a:t>
+            </a:r>
+          </a:p>
+          <a:p>
+            <a:r>
+              <a:t>直擊高二探究痛點：偷刪離群值、先射箭再畫靶。真正的科學是誠實記錄異常、公開所有限制！</a:t>
+            </a:r>
+          </a:p>
+        </p:txBody>
+      </p:sp>
+      <p:sp>
+        <p:nvSpPr>
+          <p:cNvPr id="4" name="Slide Number Placeholder 3"/>
           <p:cNvSpPr>
             <a:spLocks noGrp="1"/>
           </p:cNvSpPr>
           <p:nvPr>
-            <p:ph type="body" idx="3" sz="quarter"/>
-          </p:nvPr>
-        </p:nvSpPr>
-        <p:spPr/>
-        <p:txBody>
-          <a:bodyPr/>
-          <a:lstStyle/>
-          <a:p>
-            <a:r>
-              <a:t>【探究現場照妖鏡 · 2分鐘】</a:t>
-            </a:r>
-          </a:p>
-          <a:p>
-            <a:r>
-              <a:t>直擊高二探究痛點：偷刪離群值、先射箭再畫靶。真正的科學是誠實記錄異常、公開所有限制！</a:t>
-            </a:r>
-          </a:p>
-        </p:txBody>
-      </p:sp>
-      <p:sp>
-        <p:nvSpPr>
-          <p:cNvPr id="4" name="Slide Number Placeholder 3"/>
-          <p:cNvSpPr>
-            <a:spLocks noGrp="1"/>
-          </p:cNvSpPr>
-          <p:nvPr>
-            <p:ph type="sldNum" idx="5" sz="quarter"/>
+            <p:ph type="sldNum" sz="quarter" idx="5"/>
           </p:nvPr>
         </p:nvSpPr>
         <p:spPr/>
@@ -1482,10 +1276,9 @@
           <a:lstStyle/>
           <a:p>
             <a:r>
-              <a:rPr lang="en-US" smtClean="0"/>
+              <a:rPr lang="en-US"/>
               <a:t>Click to edit Master title style</a:t>
             </a:r>
-            <a:endParaRPr lang="en-US"/>
           </a:p>
         </p:txBody>
       </p:sp>
@@ -1601,10 +1394,9 @@
           </a:lstStyle>
           <a:p>
             <a:r>
-              <a:rPr lang="en-US" smtClean="0"/>
+              <a:rPr lang="en-US"/>
               <a:t>Click to edit Master subtitle style</a:t>
             </a:r>
-            <a:endParaRPr lang="en-US"/>
           </a:p>
         </p:txBody>
       </p:sp>
@@ -1625,7 +1417,7 @@
           <a:p>
             <a:fld id="{5BCAD085-E8A6-8845-BD4E-CB4CCA059FC4}" type="datetimeFigureOut">
               <a:rPr lang="en-US" smtClean="0"/>
-              <a:t>1/27/13</a:t>
+              <a:t>9/18/2026</a:t>
             </a:fld>
             <a:endParaRPr lang="en-US"/>
           </a:p>
@@ -1719,10 +1511,9 @@
           <a:lstStyle/>
           <a:p>
             <a:r>
-              <a:rPr lang="en-US" smtClean="0"/>
+              <a:rPr lang="en-US"/>
               <a:t>Click to edit Master title style</a:t>
             </a:r>
-            <a:endParaRPr lang="en-US"/>
           </a:p>
         </p:txBody>
       </p:sp>
@@ -1743,38 +1534,37 @@
           <a:p>
             <a:pPr lvl="0"/>
             <a:r>
-              <a:rPr lang="en-US" smtClean="0"/>
+              <a:rPr lang="en-US"/>
               <a:t>Click to edit Master text styles</a:t>
             </a:r>
           </a:p>
           <a:p>
             <a:pPr lvl="1"/>
             <a:r>
-              <a:rPr lang="en-US" smtClean="0"/>
+              <a:rPr lang="en-US"/>
               <a:t>Second level</a:t>
             </a:r>
           </a:p>
           <a:p>
             <a:pPr lvl="2"/>
             <a:r>
-              <a:rPr lang="en-US" smtClean="0"/>
+              <a:rPr lang="en-US"/>
               <a:t>Third level</a:t>
             </a:r>
           </a:p>
           <a:p>
             <a:pPr lvl="3"/>
             <a:r>
-              <a:rPr lang="en-US" smtClean="0"/>
+              <a:rPr lang="en-US"/>
               <a:t>Fourth level</a:t>
             </a:r>
           </a:p>
           <a:p>
             <a:pPr lvl="4"/>
             <a:r>
-              <a:rPr lang="en-US" smtClean="0"/>
+              <a:rPr lang="en-US"/>
               <a:t>Fifth level</a:t>
             </a:r>
-            <a:endParaRPr lang="en-US"/>
           </a:p>
         </p:txBody>
       </p:sp>
@@ -1795,7 +1585,7 @@
           <a:p>
             <a:fld id="{5BCAD085-E8A6-8845-BD4E-CB4CCA059FC4}" type="datetimeFigureOut">
               <a:rPr lang="en-US" smtClean="0"/>
-              <a:t>1/27/13</a:t>
+              <a:t>9/18/2026</a:t>
             </a:fld>
             <a:endParaRPr lang="en-US"/>
           </a:p>
@@ -1894,10 +1684,9 @@
           <a:lstStyle/>
           <a:p>
             <a:r>
-              <a:rPr lang="en-US" smtClean="0"/>
+              <a:rPr lang="en-US"/>
               <a:t>Click to edit Master title style</a:t>
             </a:r>
-            <a:endParaRPr lang="en-US"/>
           </a:p>
         </p:txBody>
       </p:sp>
@@ -1923,38 +1712,37 @@
           <a:p>
             <a:pPr lvl="0"/>
             <a:r>
-              <a:rPr lang="en-US" smtClean="0"/>
+              <a:rPr lang="en-US"/>
               <a:t>Click to edit Master text styles</a:t>
             </a:r>
           </a:p>
           <a:p>
             <a:pPr lvl="1"/>
             <a:r>
-              <a:rPr lang="en-US" smtClean="0"/>
+              <a:rPr lang="en-US"/>
               <a:t>Second level</a:t>
             </a:r>
           </a:p>
           <a:p>
             <a:pPr lvl="2"/>
             <a:r>
-              <a:rPr lang="en-US" smtClean="0"/>
+              <a:rPr lang="en-US"/>
               <a:t>Third level</a:t>
             </a:r>
           </a:p>
           <a:p>
             <a:pPr lvl="3"/>
             <a:r>
-              <a:rPr lang="en-US" smtClean="0"/>
+              <a:rPr lang="en-US"/>
               <a:t>Fourth level</a:t>
             </a:r>
           </a:p>
           <a:p>
             <a:pPr lvl="4"/>
             <a:r>
-              <a:rPr lang="en-US" smtClean="0"/>
+              <a:rPr lang="en-US"/>
               <a:t>Fifth level</a:t>
             </a:r>
-            <a:endParaRPr lang="en-US"/>
           </a:p>
         </p:txBody>
       </p:sp>
@@ -1975,7 +1763,7 @@
           <a:p>
             <a:fld id="{5BCAD085-E8A6-8845-BD4E-CB4CCA059FC4}" type="datetimeFigureOut">
               <a:rPr lang="en-US" smtClean="0"/>
-              <a:t>1/27/13</a:t>
+              <a:t>9/18/2026</a:t>
             </a:fld>
             <a:endParaRPr lang="en-US"/>
           </a:p>
@@ -2069,10 +1857,9 @@
           <a:lstStyle/>
           <a:p>
             <a:r>
-              <a:rPr lang="en-US" smtClean="0"/>
+              <a:rPr lang="en-US"/>
               <a:t>Click to edit Master title style</a:t>
             </a:r>
-            <a:endParaRPr lang="en-US"/>
           </a:p>
         </p:txBody>
       </p:sp>
@@ -2093,38 +1880,37 @@
           <a:p>
             <a:pPr lvl="0"/>
             <a:r>
-              <a:rPr lang="en-US" smtClean="0"/>
+              <a:rPr lang="en-US"/>
               <a:t>Click to edit Master text styles</a:t>
             </a:r>
           </a:p>
           <a:p>
             <a:pPr lvl="1"/>
             <a:r>
-              <a:rPr lang="en-US" smtClean="0"/>
+              <a:rPr lang="en-US"/>
               <a:t>Second level</a:t>
             </a:r>
           </a:p>
           <a:p>
             <a:pPr lvl="2"/>
             <a:r>
-              <a:rPr lang="en-US" smtClean="0"/>
+              <a:rPr lang="en-US"/>
               <a:t>Third level</a:t>
             </a:r>
           </a:p>
           <a:p>
             <a:pPr lvl="3"/>
             <a:r>
-              <a:rPr lang="en-US" smtClean="0"/>
+              <a:rPr lang="en-US"/>
               <a:t>Fourth level</a:t>
             </a:r>
           </a:p>
           <a:p>
             <a:pPr lvl="4"/>
             <a:r>
-              <a:rPr lang="en-US" smtClean="0"/>
+              <a:rPr lang="en-US"/>
               <a:t>Fifth level</a:t>
             </a:r>
-            <a:endParaRPr lang="en-US"/>
           </a:p>
         </p:txBody>
       </p:sp>
@@ -2145,7 +1931,7 @@
           <a:p>
             <a:fld id="{5BCAD085-E8A6-8845-BD4E-CB4CCA059FC4}" type="datetimeFigureOut">
               <a:rPr lang="en-US" smtClean="0"/>
-              <a:t>1/27/13</a:t>
+              <a:t>9/18/2026</a:t>
             </a:fld>
             <a:endParaRPr lang="en-US"/>
           </a:p>
@@ -2248,10 +2034,9 @@
           </a:lstStyle>
           <a:p>
             <a:r>
-              <a:rPr lang="en-US" smtClean="0"/>
+              <a:rPr lang="en-US"/>
               <a:t>Click to edit Master title style</a:t>
             </a:r>
-            <a:endParaRPr lang="en-US"/>
           </a:p>
         </p:txBody>
       </p:sp>
@@ -2368,7 +2153,7 @@
           <a:p>
             <a:pPr lvl="0"/>
             <a:r>
-              <a:rPr lang="en-US" smtClean="0"/>
+              <a:rPr lang="en-US"/>
               <a:t>Click to edit Master text styles</a:t>
             </a:r>
           </a:p>
@@ -2391,7 +2176,7 @@
           <a:p>
             <a:fld id="{5BCAD085-E8A6-8845-BD4E-CB4CCA059FC4}" type="datetimeFigureOut">
               <a:rPr lang="en-US" smtClean="0"/>
-              <a:t>1/27/13</a:t>
+              <a:t>9/18/2026</a:t>
             </a:fld>
             <a:endParaRPr lang="en-US"/>
           </a:p>
@@ -2485,10 +2270,9 @@
           <a:lstStyle/>
           <a:p>
             <a:r>
-              <a:rPr lang="en-US" smtClean="0"/>
+              <a:rPr lang="en-US"/>
               <a:t>Click to edit Master title style</a:t>
             </a:r>
-            <a:endParaRPr lang="en-US"/>
           </a:p>
         </p:txBody>
       </p:sp>
@@ -2542,38 +2326,37 @@
           <a:p>
             <a:pPr lvl="0"/>
             <a:r>
-              <a:rPr lang="en-US" smtClean="0"/>
+              <a:rPr lang="en-US"/>
               <a:t>Click to edit Master text styles</a:t>
             </a:r>
           </a:p>
           <a:p>
             <a:pPr lvl="1"/>
             <a:r>
-              <a:rPr lang="en-US" smtClean="0"/>
+              <a:rPr lang="en-US"/>
               <a:t>Second level</a:t>
             </a:r>
           </a:p>
           <a:p>
             <a:pPr lvl="2"/>
             <a:r>
-              <a:rPr lang="en-US" smtClean="0"/>
+              <a:rPr lang="en-US"/>
               <a:t>Third level</a:t>
             </a:r>
           </a:p>
           <a:p>
             <a:pPr lvl="3"/>
             <a:r>
-              <a:rPr lang="en-US" smtClean="0"/>
+              <a:rPr lang="en-US"/>
               <a:t>Fourth level</a:t>
             </a:r>
           </a:p>
           <a:p>
             <a:pPr lvl="4"/>
             <a:r>
-              <a:rPr lang="en-US" smtClean="0"/>
+              <a:rPr lang="en-US"/>
               <a:t>Fifth level</a:t>
             </a:r>
-            <a:endParaRPr lang="en-US"/>
           </a:p>
         </p:txBody>
       </p:sp>
@@ -2627,38 +2410,37 @@
           <a:p>
             <a:pPr lvl="0"/>
             <a:r>
-              <a:rPr lang="en-US" smtClean="0"/>
+              <a:rPr lang="en-US"/>
               <a:t>Click to edit Master text styles</a:t>
             </a:r>
           </a:p>
           <a:p>
             <a:pPr lvl="1"/>
             <a:r>
-              <a:rPr lang="en-US" smtClean="0"/>
+              <a:rPr lang="en-US"/>
               <a:t>Second level</a:t>
             </a:r>
           </a:p>
           <a:p>
             <a:pPr lvl="2"/>
             <a:r>
-              <a:rPr lang="en-US" smtClean="0"/>
+              <a:rPr lang="en-US"/>
               <a:t>Third level</a:t>
             </a:r>
           </a:p>
           <a:p>
             <a:pPr lvl="3"/>
             <a:r>
-              <a:rPr lang="en-US" smtClean="0"/>
+              <a:rPr lang="en-US"/>
               <a:t>Fourth level</a:t>
             </a:r>
           </a:p>
           <a:p>
             <a:pPr lvl="4"/>
             <a:r>
-              <a:rPr lang="en-US" smtClean="0"/>
+              <a:rPr lang="en-US"/>
               <a:t>Fifth level</a:t>
             </a:r>
-            <a:endParaRPr lang="en-US"/>
           </a:p>
         </p:txBody>
       </p:sp>
@@ -2679,7 +2461,7 @@
           <a:p>
             <a:fld id="{5BCAD085-E8A6-8845-BD4E-CB4CCA059FC4}" type="datetimeFigureOut">
               <a:rPr lang="en-US" smtClean="0"/>
-              <a:t>1/27/13</a:t>
+              <a:t>9/18/2026</a:t>
             </a:fld>
             <a:endParaRPr lang="en-US"/>
           </a:p>
@@ -2777,10 +2559,9 @@
           </a:lstStyle>
           <a:p>
             <a:r>
-              <a:rPr lang="en-US" smtClean="0"/>
+              <a:rPr lang="en-US"/>
               <a:t>Click to edit Master title style</a:t>
             </a:r>
-            <a:endParaRPr lang="en-US"/>
           </a:p>
         </p:txBody>
       </p:sp>
@@ -2843,7 +2624,7 @@
           <a:p>
             <a:pPr lvl="0"/>
             <a:r>
-              <a:rPr lang="en-US" smtClean="0"/>
+              <a:rPr lang="en-US"/>
               <a:t>Click to edit Master text styles</a:t>
             </a:r>
           </a:p>
@@ -2899,38 +2680,37 @@
           <a:p>
             <a:pPr lvl="0"/>
             <a:r>
-              <a:rPr lang="en-US" smtClean="0"/>
+              <a:rPr lang="en-US"/>
               <a:t>Click to edit Master text styles</a:t>
             </a:r>
           </a:p>
           <a:p>
             <a:pPr lvl="1"/>
             <a:r>
-              <a:rPr lang="en-US" smtClean="0"/>
+              <a:rPr lang="en-US"/>
               <a:t>Second level</a:t>
             </a:r>
           </a:p>
           <a:p>
             <a:pPr lvl="2"/>
             <a:r>
-              <a:rPr lang="en-US" smtClean="0"/>
+              <a:rPr lang="en-US"/>
               <a:t>Third level</a:t>
             </a:r>
           </a:p>
           <a:p>
             <a:pPr lvl="3"/>
             <a:r>
-              <a:rPr lang="en-US" smtClean="0"/>
+              <a:rPr lang="en-US"/>
               <a:t>Fourth level</a:t>
             </a:r>
           </a:p>
           <a:p>
             <a:pPr lvl="4"/>
             <a:r>
-              <a:rPr lang="en-US" smtClean="0"/>
+              <a:rPr lang="en-US"/>
               <a:t>Fifth level</a:t>
             </a:r>
-            <a:endParaRPr lang="en-US"/>
           </a:p>
         </p:txBody>
       </p:sp>
@@ -2993,7 +2773,7 @@
           <a:p>
             <a:pPr lvl="0"/>
             <a:r>
-              <a:rPr lang="en-US" smtClean="0"/>
+              <a:rPr lang="en-US"/>
               <a:t>Click to edit Master text styles</a:t>
             </a:r>
           </a:p>
@@ -3049,38 +2829,37 @@
           <a:p>
             <a:pPr lvl="0"/>
             <a:r>
-              <a:rPr lang="en-US" smtClean="0"/>
+              <a:rPr lang="en-US"/>
               <a:t>Click to edit Master text styles</a:t>
             </a:r>
           </a:p>
           <a:p>
             <a:pPr lvl="1"/>
             <a:r>
-              <a:rPr lang="en-US" smtClean="0"/>
+              <a:rPr lang="en-US"/>
               <a:t>Second level</a:t>
             </a:r>
           </a:p>
           <a:p>
             <a:pPr lvl="2"/>
             <a:r>
-              <a:rPr lang="en-US" smtClean="0"/>
+              <a:rPr lang="en-US"/>
               <a:t>Third level</a:t>
             </a:r>
           </a:p>
           <a:p>
             <a:pPr lvl="3"/>
             <a:r>
-              <a:rPr lang="en-US" smtClean="0"/>
+              <a:rPr lang="en-US"/>
               <a:t>Fourth level</a:t>
             </a:r>
           </a:p>
           <a:p>
             <a:pPr lvl="4"/>
             <a:r>
-              <a:rPr lang="en-US" smtClean="0"/>
+              <a:rPr lang="en-US"/>
               <a:t>Fifth level</a:t>
             </a:r>
-            <a:endParaRPr lang="en-US"/>
           </a:p>
         </p:txBody>
       </p:sp>
@@ -3101,7 +2880,7 @@
           <a:p>
             <a:fld id="{5BCAD085-E8A6-8845-BD4E-CB4CCA059FC4}" type="datetimeFigureOut">
               <a:rPr lang="en-US" smtClean="0"/>
-              <a:t>1/27/13</a:t>
+              <a:t>9/18/2026</a:t>
             </a:fld>
             <a:endParaRPr lang="en-US"/>
           </a:p>
@@ -3195,10 +2974,9 @@
           <a:lstStyle/>
           <a:p>
             <a:r>
-              <a:rPr lang="en-US" smtClean="0"/>
+              <a:rPr lang="en-US"/>
               <a:t>Click to edit Master title style</a:t>
             </a:r>
-            <a:endParaRPr lang="en-US"/>
           </a:p>
         </p:txBody>
       </p:sp>
@@ -3219,7 +2997,7 @@
           <a:p>
             <a:fld id="{5BCAD085-E8A6-8845-BD4E-CB4CCA059FC4}" type="datetimeFigureOut">
               <a:rPr lang="en-US" smtClean="0"/>
-              <a:t>1/27/13</a:t>
+              <a:t>9/18/2026</a:t>
             </a:fld>
             <a:endParaRPr lang="en-US"/>
           </a:p>
@@ -3314,7 +3092,7 @@
           <a:p>
             <a:fld id="{5BCAD085-E8A6-8845-BD4E-CB4CCA059FC4}" type="datetimeFigureOut">
               <a:rPr lang="en-US" smtClean="0"/>
-              <a:t>1/27/13</a:t>
+              <a:t>9/18/2026</a:t>
             </a:fld>
             <a:endParaRPr lang="en-US"/>
           </a:p>
@@ -3417,10 +3195,9 @@
           </a:lstStyle>
           <a:p>
             <a:r>
-              <a:rPr lang="en-US" smtClean="0"/>
+              <a:rPr lang="en-US"/>
               <a:t>Click to edit Master title style</a:t>
             </a:r>
-            <a:endParaRPr lang="en-US"/>
           </a:p>
         </p:txBody>
       </p:sp>
@@ -3474,38 +3251,37 @@
           <a:p>
             <a:pPr lvl="0"/>
             <a:r>
-              <a:rPr lang="en-US" smtClean="0"/>
+              <a:rPr lang="en-US"/>
               <a:t>Click to edit Master text styles</a:t>
             </a:r>
           </a:p>
           <a:p>
             <a:pPr lvl="1"/>
             <a:r>
-              <a:rPr lang="en-US" smtClean="0"/>
+              <a:rPr lang="en-US"/>
               <a:t>Second level</a:t>
             </a:r>
           </a:p>
           <a:p>
             <a:pPr lvl="2"/>
             <a:r>
-              <a:rPr lang="en-US" smtClean="0"/>
+              <a:rPr lang="en-US"/>
               <a:t>Third level</a:t>
             </a:r>
           </a:p>
           <a:p>
             <a:pPr lvl="3"/>
             <a:r>
-              <a:rPr lang="en-US" smtClean="0"/>
+              <a:rPr lang="en-US"/>
               <a:t>Fourth level</a:t>
             </a:r>
           </a:p>
           <a:p>
             <a:pPr lvl="4"/>
             <a:r>
-              <a:rPr lang="en-US" smtClean="0"/>
+              <a:rPr lang="en-US"/>
               <a:t>Fifth level</a:t>
             </a:r>
-            <a:endParaRPr lang="en-US"/>
           </a:p>
         </p:txBody>
       </p:sp>
@@ -3568,7 +3344,7 @@
           <a:p>
             <a:pPr lvl="0"/>
             <a:r>
-              <a:rPr lang="en-US" smtClean="0"/>
+              <a:rPr lang="en-US"/>
               <a:t>Click to edit Master text styles</a:t>
             </a:r>
           </a:p>
@@ -3591,7 +3367,7 @@
           <a:p>
             <a:fld id="{5BCAD085-E8A6-8845-BD4E-CB4CCA059FC4}" type="datetimeFigureOut">
               <a:rPr lang="en-US" smtClean="0"/>
-              <a:t>1/27/13</a:t>
+              <a:t>9/18/2026</a:t>
             </a:fld>
             <a:endParaRPr lang="en-US"/>
           </a:p>
@@ -3694,10 +3470,9 @@
           </a:lstStyle>
           <a:p>
             <a:r>
-              <a:rPr lang="en-US" smtClean="0"/>
+              <a:rPr lang="en-US"/>
               <a:t>Click to edit Master title style</a:t>
             </a:r>
-            <a:endParaRPr lang="en-US"/>
           </a:p>
         </p:txBody>
       </p:sp>
@@ -3821,7 +3596,7 @@
           <a:p>
             <a:pPr lvl="0"/>
             <a:r>
-              <a:rPr lang="en-US" smtClean="0"/>
+              <a:rPr lang="en-US"/>
               <a:t>Click to edit Master text styles</a:t>
             </a:r>
           </a:p>
@@ -3844,7 +3619,7 @@
           <a:p>
             <a:fld id="{5BCAD085-E8A6-8845-BD4E-CB4CCA059FC4}" type="datetimeFigureOut">
               <a:rPr lang="en-US" smtClean="0"/>
-              <a:t>1/27/13</a:t>
+              <a:t>9/18/2026</a:t>
             </a:fld>
             <a:endParaRPr lang="en-US"/>
           </a:p>
@@ -3953,10 +3728,9 @@
           <a:lstStyle/>
           <a:p>
             <a:r>
-              <a:rPr lang="en-US" smtClean="0"/>
+              <a:rPr lang="en-US"/>
               <a:t>Click to edit Master title style</a:t>
             </a:r>
-            <a:endParaRPr lang="en-US"/>
           </a:p>
         </p:txBody>
       </p:sp>
@@ -3987,38 +3761,37 @@
           <a:p>
             <a:pPr lvl="0"/>
             <a:r>
-              <a:rPr lang="en-US" smtClean="0"/>
+              <a:rPr lang="en-US"/>
               <a:t>Click to edit Master text styles</a:t>
             </a:r>
           </a:p>
           <a:p>
             <a:pPr lvl="1"/>
             <a:r>
-              <a:rPr lang="en-US" smtClean="0"/>
+              <a:rPr lang="en-US"/>
               <a:t>Second level</a:t>
             </a:r>
           </a:p>
           <a:p>
             <a:pPr lvl="2"/>
             <a:r>
-              <a:rPr lang="en-US" smtClean="0"/>
+              <a:rPr lang="en-US"/>
               <a:t>Third level</a:t>
             </a:r>
           </a:p>
           <a:p>
             <a:pPr lvl="3"/>
             <a:r>
-              <a:rPr lang="en-US" smtClean="0"/>
+              <a:rPr lang="en-US"/>
               <a:t>Fourth level</a:t>
             </a:r>
           </a:p>
           <a:p>
             <a:pPr lvl="4"/>
             <a:r>
-              <a:rPr lang="en-US" smtClean="0"/>
+              <a:rPr lang="en-US"/>
               <a:t>Fifth level</a:t>
             </a:r>
-            <a:endParaRPr lang="en-US"/>
           </a:p>
         </p:txBody>
       </p:sp>
@@ -4057,7 +3830,7 @@
           <a:p>
             <a:fld id="{5BCAD085-E8A6-8845-BD4E-CB4CCA059FC4}" type="datetimeFigureOut">
               <a:rPr lang="en-US" smtClean="0"/>
-              <a:t>1/27/13</a:t>
+              <a:t>9/18/2026</a:t>
             </a:fld>
             <a:endParaRPr lang="en-US"/>
           </a:p>
@@ -4416,7 +4189,7 @@
 </file>
 
 <file path=ppt/slides/slide1.xml><?xml version="1.0" encoding="utf-8"?>
-<p:sld xmlns:a="http://schemas.openxmlformats.org/drawingml/2006/main" xmlns:p="http://schemas.openxmlformats.org/presentationml/2006/main" xmlns:r="http://schemas.openxmlformats.org/officeDocument/2006/relationships">
+<p:sld xmlns:a="http://schemas.openxmlformats.org/drawingml/2006/main" xmlns:r="http://schemas.openxmlformats.org/officeDocument/2006/relationships" xmlns:p="http://schemas.openxmlformats.org/presentationml/2006/main">
   <p:cSld>
     <p:spTree>
       <p:nvGrpSpPr>
@@ -4424,7 +4197,14 @@
         <p:cNvGrpSpPr/>
         <p:nvPr/>
       </p:nvGrpSpPr>
-      <p:grpSpPr/>
+      <p:grpSpPr>
+        <a:xfrm>
+          <a:off x="0" y="0"/>
+          <a:ext cx="0" cy="0"/>
+          <a:chOff x="0" y="0"/>
+          <a:chExt cx="0" cy="0"/>
+        </a:xfrm>
+      </p:grpSpPr>
       <p:sp>
         <p:nvSpPr>
           <p:cNvPr id="2" name="Rectangle 1"/>
@@ -4465,6 +4245,7 @@
           <a:lstStyle/>
           <a:p>
             <a:pPr algn="ctr"/>
+            <a:endParaRPr/>
           </a:p>
         </p:txBody>
       </p:sp>
@@ -4508,6 +4289,7 @@
           <a:lstStyle/>
           <a:p>
             <a:pPr algn="ctr"/>
+            <a:endParaRPr/>
           </a:p>
         </p:txBody>
       </p:sp>
@@ -4551,6 +4333,7 @@
           <a:lstStyle/>
           <a:p>
             <a:pPr algn="ctr"/>
+            <a:endParaRPr/>
           </a:p>
         </p:txBody>
       </p:sp>
@@ -4678,42 +4461,6 @@
           </a:p>
         </p:txBody>
       </p:sp>
-      <p:sp>
-        <p:nvSpPr>
-          <p:cNvPr id="7" name="TextBox 6"/>
-          <p:cNvSpPr txBox="1"/>
-          <p:nvPr/>
-        </p:nvSpPr>
-        <p:spPr>
-          <a:xfrm>
-            <a:off x="4572000" y="5120640"/>
-            <a:ext cx="6217920" cy="1005840"/>
-          </a:xfrm>
-          <a:prstGeom prst="rect">
-            <a:avLst/>
-          </a:prstGeom>
-          <a:noFill/>
-        </p:spPr>
-        <p:txBody>
-          <a:bodyPr wrap="none">
-            <a:spAutoFit/>
-          </a:bodyPr>
-          <a:lstStyle/>
-          <a:p>
-            <a:pPr>
-              <a:defRPr sz="2600" b="1">
-                <a:solidFill>
-                  <a:srgbClr val="1C3052"/>
-                </a:solidFill>
-                <a:latin typeface="Microsoft JhengHei"/>
-              </a:defRPr>
-            </a:pPr>
-            <a:r>
-              <a:t>主講教師：物理科 樊志文老師</a:t>
-            </a:r>
-          </a:p>
-        </p:txBody>
-      </p:sp>
     </p:spTree>
   </p:cSld>
   <p:clrMapOvr>
@@ -4723,7 +4470,7 @@
 </file>
 
 <file path=ppt/slides/slide10.xml><?xml version="1.0" encoding="utf-8"?>
-<p:sld xmlns:a="http://schemas.openxmlformats.org/drawingml/2006/main" xmlns:p="http://schemas.openxmlformats.org/presentationml/2006/main" xmlns:r="http://schemas.openxmlformats.org/officeDocument/2006/relationships">
+<p:sld xmlns:a="http://schemas.openxmlformats.org/drawingml/2006/main" xmlns:r="http://schemas.openxmlformats.org/officeDocument/2006/relationships" xmlns:p="http://schemas.openxmlformats.org/presentationml/2006/main">
   <p:cSld>
     <p:spTree>
       <p:nvGrpSpPr>
@@ -4731,7 +4478,14 @@
         <p:cNvGrpSpPr/>
         <p:nvPr/>
       </p:nvGrpSpPr>
-      <p:grpSpPr/>
+      <p:grpSpPr>
+        <a:xfrm>
+          <a:off x="0" y="0"/>
+          <a:ext cx="0" cy="0"/>
+          <a:chOff x="0" y="0"/>
+          <a:chExt cx="0" cy="0"/>
+        </a:xfrm>
+      </p:grpSpPr>
       <p:sp>
         <p:nvSpPr>
           <p:cNvPr id="2" name="Rectangle 1"/>
@@ -4772,6 +4526,7 @@
           <a:lstStyle/>
           <a:p>
             <a:pPr algn="ctr"/>
+            <a:endParaRPr/>
           </a:p>
         </p:txBody>
       </p:sp>
@@ -4792,7 +4547,7 @@
           <a:noFill/>
         </p:spPr>
         <p:txBody>
-          <a:bodyPr wrap="square" lIns="0" rIns="0" tIns="0" bIns="0">
+          <a:bodyPr wrap="square" lIns="0" tIns="0" rIns="0" bIns="0">
             <a:spAutoFit/>
           </a:bodyPr>
           <a:lstStyle/>
@@ -4865,7 +4620,7 @@
           </a:fontRef>
         </p:style>
         <p:txBody>
-          <a:bodyPr rtlCol="0" anchor="ctr" wrap="square" lIns="228600" rIns="228600" tIns="182880" bIns="182880"/>
+          <a:bodyPr wrap="square" lIns="228600" tIns="182880" rIns="228600" bIns="182880" rtlCol="0" anchor="ctr"/>
           <a:lstStyle/>
           <a:p>
             <a:pPr algn="ctr">
@@ -4960,7 +4715,7 @@
           </a:fontRef>
         </p:style>
         <p:txBody>
-          <a:bodyPr rtlCol="0" anchor="ctr" wrap="square" lIns="228600" rIns="228600" tIns="182880" bIns="182880"/>
+          <a:bodyPr wrap="square" lIns="228600" tIns="182880" rIns="228600" bIns="182880" rtlCol="0" anchor="ctr"/>
           <a:lstStyle/>
           <a:p>
             <a:pPr algn="ctr">
@@ -4975,10 +4730,14 @@
               </a:defRPr>
             </a:pPr>
             <a:r>
+              <a:rPr dirty="0" err="1"/>
               <a:t>偽科學</a:t>
             </a:r>
-            <a:br/>
-            <a:r>
+            <a:br>
+              <a:rPr dirty="0"/>
+            </a:br>
+            <a:r>
+              <a:rPr dirty="0"/>
               <a:t>(Pseudo-)</a:t>
             </a:r>
           </a:p>
@@ -4995,8 +4754,10 @@
               </a:defRPr>
             </a:pPr>
             <a:r>
+              <a:rPr dirty="0" err="1"/>
               <a:t>模仿名詞，不可證偽</a:t>
             </a:r>
+            <a:endParaRPr dirty="0"/>
           </a:p>
           <a:p>
             <a:pPr>
@@ -5008,11 +4769,23 @@
               </a:defRPr>
             </a:pPr>
             <a:r>
-              <a:t>如量子手環、占星。</a:t>
-            </a:r>
-            <a:br/>
-            <a:r>
-              <a:t>永遠立於不敗之地，絕不認錯。</a:t>
+              <a:rPr dirty="0" err="1"/>
+              <a:t>如量子手環、占星</a:t>
+            </a:r>
+            <a:r>
+              <a:rPr dirty="0"/>
+              <a:t>。</a:t>
+            </a:r>
+            <a:br>
+              <a:rPr dirty="0"/>
+            </a:br>
+            <a:r>
+              <a:rPr dirty="0" err="1"/>
+              <a:t>永遠立於不敗之地，絕不認錯</a:t>
+            </a:r>
+            <a:r>
+              <a:rPr dirty="0"/>
+              <a:t>。</a:t>
             </a:r>
           </a:p>
         </p:txBody>
@@ -5055,7 +4828,7 @@
           </a:fontRef>
         </p:style>
         <p:txBody>
-          <a:bodyPr rtlCol="0" anchor="ctr" wrap="square" lIns="228600" rIns="228600" tIns="182880" bIns="182880"/>
+          <a:bodyPr wrap="square" lIns="228600" tIns="182880" rIns="228600" bIns="182880" rtlCol="0" anchor="ctr"/>
           <a:lstStyle/>
           <a:p>
             <a:pPr algn="ctr">
@@ -5070,10 +4843,14 @@
               </a:defRPr>
             </a:pPr>
             <a:r>
+              <a:rPr dirty="0" err="1"/>
               <a:t>貨物崇拜</a:t>
             </a:r>
-            <a:br/>
-            <a:r>
+            <a:br>
+              <a:rPr dirty="0"/>
+            </a:br>
+            <a:r>
+              <a:rPr dirty="0"/>
               <a:t>(Cargo Cult)</a:t>
             </a:r>
           </a:p>
@@ -5090,8 +4867,10 @@
               </a:defRPr>
             </a:pPr>
             <a:r>
+              <a:rPr dirty="0" err="1"/>
               <a:t>具備外殼，缺乏誠實</a:t>
             </a:r>
+            <a:endParaRPr dirty="0"/>
           </a:p>
           <a:p>
             <a:pPr>
@@ -5103,11 +4882,23 @@
               </a:defRPr>
             </a:pPr>
             <a:r>
-              <a:t>如探究偷改數據、先射箭再畫靶。</a:t>
-            </a:r>
-            <a:br/>
-            <a:r>
-              <a:t>形式滿分、靈魂缺席。</a:t>
+              <a:rPr dirty="0" err="1"/>
+              <a:t>如探究偷改數據、先射箭再畫靶</a:t>
+            </a:r>
+            <a:r>
+              <a:rPr dirty="0"/>
+              <a:t>。</a:t>
+            </a:r>
+            <a:br>
+              <a:rPr dirty="0"/>
+            </a:br>
+            <a:r>
+              <a:rPr dirty="0" err="1"/>
+              <a:t>形式滿分、靈魂缺席</a:t>
+            </a:r>
+            <a:r>
+              <a:rPr dirty="0"/>
+              <a:t>。</a:t>
             </a:r>
           </a:p>
         </p:txBody>
@@ -5150,7 +4941,7 @@
           </a:fontRef>
         </p:style>
         <p:txBody>
-          <a:bodyPr rtlCol="0" anchor="ctr" wrap="square" lIns="228600" rIns="228600" tIns="182880" bIns="182880"/>
+          <a:bodyPr wrap="square" lIns="228600" tIns="182880" rIns="228600" bIns="182880" rtlCol="0" anchor="ctr"/>
           <a:lstStyle/>
           <a:p>
             <a:pPr algn="ctr">
@@ -5245,7 +5036,7 @@
           </a:fontRef>
         </p:style>
         <p:txBody>
-          <a:bodyPr rtlCol="0" anchor="ctr" wrap="square" lIns="228600" rIns="228600" tIns="182880" bIns="182880"/>
+          <a:bodyPr wrap="square" lIns="228600" tIns="182880" rIns="228600" bIns="182880" rtlCol="0" anchor="ctr"/>
           <a:lstStyle/>
           <a:p>
             <a:pPr algn="ctr">
@@ -5260,10 +5051,14 @@
               </a:defRPr>
             </a:pPr>
             <a:r>
+              <a:rPr dirty="0" err="1"/>
               <a:t>正統科學</a:t>
             </a:r>
-            <a:br/>
-            <a:r>
+            <a:br>
+              <a:rPr dirty="0"/>
+            </a:br>
+            <a:r>
+              <a:rPr dirty="0"/>
               <a:t>(Orthodox)</a:t>
             </a:r>
           </a:p>
@@ -5280,8 +5075,10 @@
               </a:defRPr>
             </a:pPr>
             <a:r>
+              <a:rPr dirty="0" err="1"/>
               <a:t>可證偽、重複檢驗</a:t>
             </a:r>
+            <a:endParaRPr dirty="0"/>
           </a:p>
           <a:p>
             <a:pPr>
@@ -5293,11 +5090,23 @@
               </a:defRPr>
             </a:pPr>
             <a:r>
-              <a:t>如量子力學、相對論。</a:t>
-            </a:r>
-            <a:br/>
-            <a:r>
-              <a:t>歡迎全世界拿數據來打臉修正！</a:t>
+              <a:rPr dirty="0" err="1"/>
+              <a:t>如量子力學、相對論</a:t>
+            </a:r>
+            <a:r>
+              <a:rPr dirty="0"/>
+              <a:t>。</a:t>
+            </a:r>
+            <a:br>
+              <a:rPr dirty="0"/>
+            </a:br>
+            <a:r>
+              <a:rPr dirty="0" err="1"/>
+              <a:t>歡迎全世界拿數據來打臉修正</a:t>
+            </a:r>
+            <a:r>
+              <a:rPr dirty="0"/>
+              <a:t>！</a:t>
             </a:r>
           </a:p>
         </p:txBody>
@@ -5311,7 +5120,7 @@
 </file>
 
 <file path=ppt/slides/slide11.xml><?xml version="1.0" encoding="utf-8"?>
-<p:sld xmlns:a="http://schemas.openxmlformats.org/drawingml/2006/main" xmlns:p="http://schemas.openxmlformats.org/presentationml/2006/main" xmlns:r="http://schemas.openxmlformats.org/officeDocument/2006/relationships">
+<p:sld xmlns:a="http://schemas.openxmlformats.org/drawingml/2006/main" xmlns:r="http://schemas.openxmlformats.org/officeDocument/2006/relationships" xmlns:p="http://schemas.openxmlformats.org/presentationml/2006/main">
   <p:cSld>
     <p:spTree>
       <p:nvGrpSpPr>
@@ -5319,7 +5128,14 @@
         <p:cNvGrpSpPr/>
         <p:nvPr/>
       </p:nvGrpSpPr>
-      <p:grpSpPr/>
+      <p:grpSpPr>
+        <a:xfrm>
+          <a:off x="0" y="0"/>
+          <a:ext cx="0" cy="0"/>
+          <a:chOff x="0" y="0"/>
+          <a:chExt cx="0" cy="0"/>
+        </a:xfrm>
+      </p:grpSpPr>
       <p:sp>
         <p:nvSpPr>
           <p:cNvPr id="2" name="Rectangle 1"/>
@@ -5360,6 +5176,7 @@
           <a:lstStyle/>
           <a:p>
             <a:pPr algn="ctr"/>
+            <a:endParaRPr/>
           </a:p>
         </p:txBody>
       </p:sp>
@@ -5380,7 +5197,7 @@
           <a:noFill/>
         </p:spPr>
         <p:txBody>
-          <a:bodyPr wrap="square" lIns="0" rIns="0" tIns="0" bIns="0">
+          <a:bodyPr wrap="square" lIns="0" tIns="0" rIns="0" bIns="0">
             <a:spAutoFit/>
           </a:bodyPr>
           <a:lstStyle/>
@@ -5453,7 +5270,7 @@
           </a:fontRef>
         </p:style>
         <p:txBody>
-          <a:bodyPr rtlCol="0" anchor="ctr" wrap="square" lIns="228600" rIns="228600" tIns="182880" bIns="182880"/>
+          <a:bodyPr wrap="square" lIns="228600" tIns="182880" rIns="228600" bIns="182880" rtlCol="0" anchor="ctr"/>
           <a:lstStyle/>
           <a:p>
             <a:pPr algn="ctr">
@@ -5517,7 +5334,7 @@
           </a:fontRef>
         </p:style>
         <p:txBody>
-          <a:bodyPr rtlCol="0" anchor="ctr" wrap="square" lIns="228600" rIns="228600" tIns="182880" bIns="182880"/>
+          <a:bodyPr wrap="square" lIns="228600" tIns="182880" rIns="228600" bIns="182880" rtlCol="0" anchor="ctr"/>
           <a:lstStyle/>
           <a:p>
             <a:pPr algn="ctr">
@@ -5581,7 +5398,7 @@
           </a:fontRef>
         </p:style>
         <p:txBody>
-          <a:bodyPr rtlCol="0" anchor="ctr" wrap="square" lIns="228600" rIns="228600" tIns="182880" bIns="182880"/>
+          <a:bodyPr wrap="square" lIns="228600" tIns="182880" rIns="228600" bIns="182880" rtlCol="0" anchor="ctr"/>
           <a:lstStyle/>
           <a:p>
             <a:pPr algn="ctr">
@@ -5645,7 +5462,7 @@
           </a:fontRef>
         </p:style>
         <p:txBody>
-          <a:bodyPr rtlCol="0" anchor="ctr" wrap="square" lIns="228600" rIns="228600" tIns="182880" bIns="182880"/>
+          <a:bodyPr wrap="square" lIns="228600" tIns="182880" rIns="228600" bIns="182880" rtlCol="0" anchor="ctr"/>
           <a:lstStyle/>
           <a:p>
             <a:pPr algn="ctr">
@@ -5680,7 +5497,7 @@
 </file>
 
 <file path=ppt/slides/slide12.xml><?xml version="1.0" encoding="utf-8"?>
-<p:sld xmlns:a="http://schemas.openxmlformats.org/drawingml/2006/main" xmlns:p="http://schemas.openxmlformats.org/presentationml/2006/main" xmlns:r="http://schemas.openxmlformats.org/officeDocument/2006/relationships">
+<p:sld xmlns:a="http://schemas.openxmlformats.org/drawingml/2006/main" xmlns:r="http://schemas.openxmlformats.org/officeDocument/2006/relationships" xmlns:p="http://schemas.openxmlformats.org/presentationml/2006/main">
   <p:cSld>
     <p:spTree>
       <p:nvGrpSpPr>
@@ -5688,7 +5505,14 @@
         <p:cNvGrpSpPr/>
         <p:nvPr/>
       </p:nvGrpSpPr>
-      <p:grpSpPr/>
+      <p:grpSpPr>
+        <a:xfrm>
+          <a:off x="0" y="0"/>
+          <a:ext cx="0" cy="0"/>
+          <a:chOff x="0" y="0"/>
+          <a:chExt cx="0" cy="0"/>
+        </a:xfrm>
+      </p:grpSpPr>
       <p:sp>
         <p:nvSpPr>
           <p:cNvPr id="2" name="Rectangle 1"/>
@@ -5729,6 +5553,7 @@
           <a:lstStyle/>
           <a:p>
             <a:pPr algn="ctr"/>
+            <a:endParaRPr/>
           </a:p>
         </p:txBody>
       </p:sp>
@@ -5749,7 +5574,7 @@
           <a:noFill/>
         </p:spPr>
         <p:txBody>
-          <a:bodyPr wrap="square" lIns="0" rIns="0" tIns="0" bIns="0">
+          <a:bodyPr wrap="square" lIns="0" tIns="0" rIns="0" bIns="0">
             <a:spAutoFit/>
           </a:bodyPr>
           <a:lstStyle/>
@@ -5822,7 +5647,7 @@
           </a:fontRef>
         </p:style>
         <p:txBody>
-          <a:bodyPr rtlCol="0" anchor="ctr" wrap="square" lIns="228600" rIns="228600" tIns="182880" bIns="182880"/>
+          <a:bodyPr wrap="square" lIns="228600" tIns="182880" rIns="228600" bIns="182880" rtlCol="0" anchor="ctr"/>
           <a:lstStyle/>
           <a:p>
             <a:pPr algn="ctr">
@@ -5938,7 +5763,7 @@
           </a:fontRef>
         </p:style>
         <p:txBody>
-          <a:bodyPr rtlCol="0" anchor="ctr" wrap="square" lIns="228600" rIns="228600" tIns="182880" bIns="182880"/>
+          <a:bodyPr wrap="square" lIns="228600" tIns="182880" rIns="228600" bIns="182880" rtlCol="0" anchor="ctr"/>
           <a:lstStyle/>
           <a:p>
             <a:pPr algn="ctr">
@@ -6025,7 +5850,7 @@
 </file>
 
 <file path=ppt/slides/slide13.xml><?xml version="1.0" encoding="utf-8"?>
-<p:sld xmlns:a="http://schemas.openxmlformats.org/drawingml/2006/main" xmlns:p="http://schemas.openxmlformats.org/presentationml/2006/main" xmlns:r="http://schemas.openxmlformats.org/officeDocument/2006/relationships">
+<p:sld xmlns:a="http://schemas.openxmlformats.org/drawingml/2006/main" xmlns:r="http://schemas.openxmlformats.org/officeDocument/2006/relationships" xmlns:p="http://schemas.openxmlformats.org/presentationml/2006/main">
   <p:cSld>
     <p:spTree>
       <p:nvGrpSpPr>
@@ -6033,7 +5858,14 @@
         <p:cNvGrpSpPr/>
         <p:nvPr/>
       </p:nvGrpSpPr>
-      <p:grpSpPr/>
+      <p:grpSpPr>
+        <a:xfrm>
+          <a:off x="0" y="0"/>
+          <a:ext cx="0" cy="0"/>
+          <a:chOff x="0" y="0"/>
+          <a:chExt cx="0" cy="0"/>
+        </a:xfrm>
+      </p:grpSpPr>
       <p:sp>
         <p:nvSpPr>
           <p:cNvPr id="2" name="Rectangle 1"/>
@@ -6074,6 +5906,7 @@
           <a:lstStyle/>
           <a:p>
             <a:pPr algn="ctr"/>
+            <a:endParaRPr/>
           </a:p>
         </p:txBody>
       </p:sp>
@@ -6167,7 +6000,7 @@
           </a:fontRef>
         </p:style>
         <p:txBody>
-          <a:bodyPr rtlCol="0" anchor="ctr" wrap="square" lIns="228600" rIns="228600" tIns="182880" bIns="182880"/>
+          <a:bodyPr wrap="square" lIns="228600" tIns="182880" rIns="228600" bIns="182880" rtlCol="0" anchor="ctr"/>
           <a:lstStyle/>
           <a:p>
             <a:pPr algn="ctr">
@@ -6241,7 +6074,7 @@
 </file>
 
 <file path=ppt/slides/slide2.xml><?xml version="1.0" encoding="utf-8"?>
-<p:sld xmlns:a="http://schemas.openxmlformats.org/drawingml/2006/main" xmlns:p="http://schemas.openxmlformats.org/presentationml/2006/main" xmlns:r="http://schemas.openxmlformats.org/officeDocument/2006/relationships">
+<p:sld xmlns:a="http://schemas.openxmlformats.org/drawingml/2006/main" xmlns:r="http://schemas.openxmlformats.org/officeDocument/2006/relationships" xmlns:p="http://schemas.openxmlformats.org/presentationml/2006/main">
   <p:cSld>
     <p:spTree>
       <p:nvGrpSpPr>
@@ -6249,7 +6082,14 @@
         <p:cNvGrpSpPr/>
         <p:nvPr/>
       </p:nvGrpSpPr>
-      <p:grpSpPr/>
+      <p:grpSpPr>
+        <a:xfrm>
+          <a:off x="0" y="0"/>
+          <a:ext cx="0" cy="0"/>
+          <a:chOff x="0" y="0"/>
+          <a:chExt cx="0" cy="0"/>
+        </a:xfrm>
+      </p:grpSpPr>
       <p:sp>
         <p:nvSpPr>
           <p:cNvPr id="2" name="Rectangle 1"/>
@@ -6290,6 +6130,7 @@
           <a:lstStyle/>
           <a:p>
             <a:pPr algn="ctr"/>
+            <a:endParaRPr/>
           </a:p>
         </p:txBody>
       </p:sp>
@@ -6310,7 +6151,7 @@
           <a:noFill/>
         </p:spPr>
         <p:txBody>
-          <a:bodyPr wrap="square" lIns="0" rIns="0" tIns="0" bIns="0">
+          <a:bodyPr wrap="square" lIns="0" tIns="0" rIns="0" bIns="0">
             <a:spAutoFit/>
           </a:bodyPr>
           <a:lstStyle/>
@@ -6383,7 +6224,7 @@
           </a:fontRef>
         </p:style>
         <p:txBody>
-          <a:bodyPr rtlCol="0" anchor="ctr" wrap="square" lIns="228600" rIns="228600" tIns="182880" bIns="182880"/>
+          <a:bodyPr wrap="square" lIns="228600" tIns="182880" rIns="228600" bIns="182880" rtlCol="0" anchor="ctr"/>
           <a:lstStyle/>
           <a:p>
             <a:pPr algn="ctr">
@@ -6521,7 +6362,7 @@
           </a:fontRef>
         </p:style>
         <p:txBody>
-          <a:bodyPr rtlCol="0" anchor="ctr" wrap="square" lIns="228600" rIns="228600" tIns="182880" bIns="182880"/>
+          <a:bodyPr wrap="square" lIns="228600" tIns="182880" rIns="228600" bIns="182880" rtlCol="0" anchor="ctr"/>
           <a:lstStyle/>
           <a:p>
             <a:pPr algn="ctr">
@@ -6630,7 +6471,7 @@
 </file>
 
 <file path=ppt/slides/slide3.xml><?xml version="1.0" encoding="utf-8"?>
-<p:sld xmlns:a="http://schemas.openxmlformats.org/drawingml/2006/main" xmlns:p="http://schemas.openxmlformats.org/presentationml/2006/main" xmlns:r="http://schemas.openxmlformats.org/officeDocument/2006/relationships">
+<p:sld xmlns:a="http://schemas.openxmlformats.org/drawingml/2006/main" xmlns:r="http://schemas.openxmlformats.org/officeDocument/2006/relationships" xmlns:p="http://schemas.openxmlformats.org/presentationml/2006/main">
   <p:cSld>
     <p:spTree>
       <p:nvGrpSpPr>
@@ -6638,7 +6479,14 @@
         <p:cNvGrpSpPr/>
         <p:nvPr/>
       </p:nvGrpSpPr>
-      <p:grpSpPr/>
+      <p:grpSpPr>
+        <a:xfrm>
+          <a:off x="0" y="0"/>
+          <a:ext cx="0" cy="0"/>
+          <a:chOff x="0" y="0"/>
+          <a:chExt cx="0" cy="0"/>
+        </a:xfrm>
+      </p:grpSpPr>
       <p:sp>
         <p:nvSpPr>
           <p:cNvPr id="2" name="Rectangle 1"/>
@@ -6679,6 +6527,7 @@
           <a:lstStyle/>
           <a:p>
             <a:pPr algn="ctr"/>
+            <a:endParaRPr/>
           </a:p>
         </p:txBody>
       </p:sp>
@@ -6699,7 +6548,7 @@
           <a:noFill/>
         </p:spPr>
         <p:txBody>
-          <a:bodyPr wrap="square" lIns="0" rIns="0" tIns="0" bIns="0">
+          <a:bodyPr wrap="square" lIns="0" tIns="0" rIns="0" bIns="0">
             <a:spAutoFit/>
           </a:bodyPr>
           <a:lstStyle/>
@@ -6772,7 +6621,7 @@
           </a:fontRef>
         </p:style>
         <p:txBody>
-          <a:bodyPr rtlCol="0" anchor="ctr" wrap="square" lIns="228600" rIns="228600" tIns="182880" bIns="182880"/>
+          <a:bodyPr wrap="square" lIns="228600" tIns="182880" rIns="228600" bIns="182880" rtlCol="0" anchor="ctr"/>
           <a:lstStyle/>
           <a:p>
             <a:pPr algn="ctr">
@@ -6843,7 +6692,7 @@
           </a:fontRef>
         </p:style>
         <p:txBody>
-          <a:bodyPr rtlCol="0" anchor="ctr" wrap="square" lIns="228600" rIns="228600" tIns="182880" bIns="182880"/>
+          <a:bodyPr wrap="square" lIns="228600" tIns="182880" rIns="228600" bIns="182880" rtlCol="0" anchor="ctr"/>
           <a:lstStyle/>
           <a:p>
             <a:pPr algn="ctr">
@@ -6914,7 +6763,7 @@
           </a:fontRef>
         </p:style>
         <p:txBody>
-          <a:bodyPr rtlCol="0" anchor="ctr" wrap="square" lIns="228600" rIns="228600" tIns="182880" bIns="182880"/>
+          <a:bodyPr wrap="square" lIns="228600" tIns="182880" rIns="228600" bIns="182880" rtlCol="0" anchor="ctr"/>
           <a:lstStyle/>
           <a:p>
             <a:pPr algn="ctr">
@@ -6985,7 +6834,7 @@
           </a:fontRef>
         </p:style>
         <p:txBody>
-          <a:bodyPr rtlCol="0" anchor="ctr" wrap="square" lIns="228600" rIns="228600" tIns="182880" bIns="182880"/>
+          <a:bodyPr wrap="square" lIns="228600" tIns="182880" rIns="228600" bIns="182880" rtlCol="0" anchor="ctr"/>
           <a:lstStyle/>
           <a:p>
             <a:pPr algn="ctr">
@@ -7027,7 +6876,7 @@
 </file>
 
 <file path=ppt/slides/slide4.xml><?xml version="1.0" encoding="utf-8"?>
-<p:sld xmlns:a="http://schemas.openxmlformats.org/drawingml/2006/main" xmlns:p="http://schemas.openxmlformats.org/presentationml/2006/main" xmlns:r="http://schemas.openxmlformats.org/officeDocument/2006/relationships">
+<p:sld xmlns:a="http://schemas.openxmlformats.org/drawingml/2006/main" xmlns:r="http://schemas.openxmlformats.org/officeDocument/2006/relationships" xmlns:p="http://schemas.openxmlformats.org/presentationml/2006/main">
   <p:cSld>
     <p:spTree>
       <p:nvGrpSpPr>
@@ -7035,7 +6884,14 @@
         <p:cNvGrpSpPr/>
         <p:nvPr/>
       </p:nvGrpSpPr>
-      <p:grpSpPr/>
+      <p:grpSpPr>
+        <a:xfrm>
+          <a:off x="0" y="0"/>
+          <a:ext cx="0" cy="0"/>
+          <a:chOff x="0" y="0"/>
+          <a:chExt cx="0" cy="0"/>
+        </a:xfrm>
+      </p:grpSpPr>
       <p:sp>
         <p:nvSpPr>
           <p:cNvPr id="2" name="Rectangle 1"/>
@@ -7076,6 +6932,7 @@
           <a:lstStyle/>
           <a:p>
             <a:pPr algn="ctr"/>
+            <a:endParaRPr/>
           </a:p>
         </p:txBody>
       </p:sp>
@@ -7096,7 +6953,7 @@
           <a:noFill/>
         </p:spPr>
         <p:txBody>
-          <a:bodyPr wrap="square" lIns="0" rIns="0" tIns="0" bIns="0">
+          <a:bodyPr wrap="square" lIns="0" tIns="0" rIns="0" bIns="0">
             <a:spAutoFit/>
           </a:bodyPr>
           <a:lstStyle/>
@@ -7169,7 +7026,7 @@
           </a:fontRef>
         </p:style>
         <p:txBody>
-          <a:bodyPr rtlCol="0" anchor="ctr" wrap="square" lIns="228600" rIns="228600" tIns="182880" bIns="182880"/>
+          <a:bodyPr wrap="square" lIns="228600" tIns="182880" rIns="228600" bIns="182880" rtlCol="0" anchor="ctr"/>
           <a:lstStyle/>
           <a:p>
             <a:pPr algn="ctr">
@@ -7233,7 +7090,7 @@
           </a:fontRef>
         </p:style>
         <p:txBody>
-          <a:bodyPr rtlCol="0" anchor="ctr" wrap="square" lIns="228600" rIns="228600" tIns="182880" bIns="182880"/>
+          <a:bodyPr wrap="square" lIns="228600" tIns="182880" rIns="228600" bIns="182880" rtlCol="0" anchor="ctr"/>
           <a:lstStyle/>
           <a:p>
             <a:pPr algn="ctr">
@@ -7297,7 +7154,7 @@
           </a:fontRef>
         </p:style>
         <p:txBody>
-          <a:bodyPr rtlCol="0" anchor="ctr" wrap="square" lIns="228600" rIns="228600" tIns="182880" bIns="182880"/>
+          <a:bodyPr wrap="square" lIns="228600" tIns="182880" rIns="228600" bIns="182880" rtlCol="0" anchor="ctr"/>
           <a:lstStyle/>
           <a:p>
             <a:pPr algn="ctr">
@@ -7361,7 +7218,7 @@
           </a:fontRef>
         </p:style>
         <p:txBody>
-          <a:bodyPr rtlCol="0" anchor="ctr" wrap="square" lIns="228600" rIns="228600" tIns="182880" bIns="182880"/>
+          <a:bodyPr wrap="square" lIns="228600" tIns="182880" rIns="228600" bIns="182880" rtlCol="0" anchor="ctr"/>
           <a:lstStyle/>
           <a:p>
             <a:pPr algn="ctr">
@@ -7396,7 +7253,7 @@
 </file>
 
 <file path=ppt/slides/slide5.xml><?xml version="1.0" encoding="utf-8"?>
-<p:sld xmlns:a="http://schemas.openxmlformats.org/drawingml/2006/main" xmlns:p="http://schemas.openxmlformats.org/presentationml/2006/main" xmlns:r="http://schemas.openxmlformats.org/officeDocument/2006/relationships">
+<p:sld xmlns:a="http://schemas.openxmlformats.org/drawingml/2006/main" xmlns:r="http://schemas.openxmlformats.org/officeDocument/2006/relationships" xmlns:p="http://schemas.openxmlformats.org/presentationml/2006/main">
   <p:cSld>
     <p:spTree>
       <p:nvGrpSpPr>
@@ -7404,7 +7261,14 @@
         <p:cNvGrpSpPr/>
         <p:nvPr/>
       </p:nvGrpSpPr>
-      <p:grpSpPr/>
+      <p:grpSpPr>
+        <a:xfrm>
+          <a:off x="0" y="0"/>
+          <a:ext cx="0" cy="0"/>
+          <a:chOff x="0" y="0"/>
+          <a:chExt cx="0" cy="0"/>
+        </a:xfrm>
+      </p:grpSpPr>
       <p:sp>
         <p:nvSpPr>
           <p:cNvPr id="2" name="Rectangle 1"/>
@@ -7445,6 +7309,7 @@
           <a:lstStyle/>
           <a:p>
             <a:pPr algn="ctr"/>
+            <a:endParaRPr/>
           </a:p>
         </p:txBody>
       </p:sp>
@@ -7465,7 +7330,7 @@
           <a:noFill/>
         </p:spPr>
         <p:txBody>
-          <a:bodyPr wrap="square" lIns="0" rIns="0" tIns="0" bIns="0">
+          <a:bodyPr wrap="square" lIns="0" tIns="0" rIns="0" bIns="0">
             <a:spAutoFit/>
           </a:bodyPr>
           <a:lstStyle/>
@@ -7538,7 +7403,7 @@
           </a:fontRef>
         </p:style>
         <p:txBody>
-          <a:bodyPr rtlCol="0" anchor="ctr" wrap="square" lIns="228600" rIns="228600" tIns="182880" bIns="182880"/>
+          <a:bodyPr wrap="square" lIns="228600" tIns="182880" rIns="228600" bIns="182880" rtlCol="0" anchor="ctr"/>
           <a:lstStyle/>
           <a:p>
             <a:pPr algn="ctr">
@@ -7660,7 +7525,7 @@
           </a:fontRef>
         </p:style>
         <p:txBody>
-          <a:bodyPr rtlCol="0" anchor="ctr" wrap="square" lIns="228600" rIns="228600" tIns="182880" bIns="182880"/>
+          <a:bodyPr wrap="square" lIns="228600" tIns="182880" rIns="228600" bIns="182880" rtlCol="0" anchor="ctr"/>
           <a:lstStyle/>
           <a:p>
             <a:pPr algn="ctr">
@@ -7782,7 +7647,7 @@
           </a:fontRef>
         </p:style>
         <p:txBody>
-          <a:bodyPr rtlCol="0" anchor="ctr" wrap="square" lIns="228600" rIns="228600" tIns="182880" bIns="182880"/>
+          <a:bodyPr wrap="square" lIns="228600" tIns="182880" rIns="228600" bIns="182880" rtlCol="0" anchor="ctr"/>
           <a:lstStyle/>
           <a:p>
             <a:pPr algn="ctr">
@@ -7875,7 +7740,7 @@
 </file>
 
 <file path=ppt/slides/slide6.xml><?xml version="1.0" encoding="utf-8"?>
-<p:sld xmlns:a="http://schemas.openxmlformats.org/drawingml/2006/main" xmlns:p="http://schemas.openxmlformats.org/presentationml/2006/main" xmlns:r="http://schemas.openxmlformats.org/officeDocument/2006/relationships">
+<p:sld xmlns:a="http://schemas.openxmlformats.org/drawingml/2006/main" xmlns:r="http://schemas.openxmlformats.org/officeDocument/2006/relationships" xmlns:p="http://schemas.openxmlformats.org/presentationml/2006/main">
   <p:cSld>
     <p:spTree>
       <p:nvGrpSpPr>
@@ -7883,7 +7748,14 @@
         <p:cNvGrpSpPr/>
         <p:nvPr/>
       </p:nvGrpSpPr>
-      <p:grpSpPr/>
+      <p:grpSpPr>
+        <a:xfrm>
+          <a:off x="0" y="0"/>
+          <a:ext cx="0" cy="0"/>
+          <a:chOff x="0" y="0"/>
+          <a:chExt cx="0" cy="0"/>
+        </a:xfrm>
+      </p:grpSpPr>
       <p:sp>
         <p:nvSpPr>
           <p:cNvPr id="2" name="Rectangle 1"/>
@@ -7924,6 +7796,7 @@
           <a:lstStyle/>
           <a:p>
             <a:pPr algn="ctr"/>
+            <a:endParaRPr/>
           </a:p>
         </p:txBody>
       </p:sp>
@@ -7944,7 +7817,7 @@
           <a:noFill/>
         </p:spPr>
         <p:txBody>
-          <a:bodyPr wrap="square" lIns="0" rIns="0" tIns="0" bIns="0">
+          <a:bodyPr wrap="square" lIns="0" tIns="0" rIns="0" bIns="0">
             <a:spAutoFit/>
           </a:bodyPr>
           <a:lstStyle/>
@@ -8017,7 +7890,7 @@
           </a:fontRef>
         </p:style>
         <p:txBody>
-          <a:bodyPr rtlCol="0" anchor="ctr" wrap="square" lIns="228600" rIns="228600" tIns="182880" bIns="182880"/>
+          <a:bodyPr wrap="square" lIns="228600" tIns="182880" rIns="228600" bIns="182880" rtlCol="0" anchor="ctr"/>
           <a:lstStyle/>
           <a:p>
             <a:pPr algn="ctr">
@@ -8130,7 +8003,7 @@
           </a:fontRef>
         </p:style>
         <p:txBody>
-          <a:bodyPr rtlCol="0" anchor="ctr" wrap="square" lIns="228600" rIns="228600" tIns="182880" bIns="182880"/>
+          <a:bodyPr wrap="square" lIns="228600" tIns="182880" rIns="228600" bIns="182880" rtlCol="0" anchor="ctr"/>
           <a:lstStyle/>
           <a:p>
             <a:pPr algn="ctr">
@@ -8172,7 +8045,7 @@
 </file>
 
 <file path=ppt/slides/slide7.xml><?xml version="1.0" encoding="utf-8"?>
-<p:sld xmlns:a="http://schemas.openxmlformats.org/drawingml/2006/main" xmlns:p="http://schemas.openxmlformats.org/presentationml/2006/main" xmlns:r="http://schemas.openxmlformats.org/officeDocument/2006/relationships">
+<p:sld xmlns:a="http://schemas.openxmlformats.org/drawingml/2006/main" xmlns:r="http://schemas.openxmlformats.org/officeDocument/2006/relationships" xmlns:p="http://schemas.openxmlformats.org/presentationml/2006/main">
   <p:cSld>
     <p:spTree>
       <p:nvGrpSpPr>
@@ -8180,7 +8053,14 @@
         <p:cNvGrpSpPr/>
         <p:nvPr/>
       </p:nvGrpSpPr>
-      <p:grpSpPr/>
+      <p:grpSpPr>
+        <a:xfrm>
+          <a:off x="0" y="0"/>
+          <a:ext cx="0" cy="0"/>
+          <a:chOff x="0" y="0"/>
+          <a:chExt cx="0" cy="0"/>
+        </a:xfrm>
+      </p:grpSpPr>
       <p:sp>
         <p:nvSpPr>
           <p:cNvPr id="2" name="Rectangle 1"/>
@@ -8221,6 +8101,7 @@
           <a:lstStyle/>
           <a:p>
             <a:pPr algn="ctr"/>
+            <a:endParaRPr/>
           </a:p>
         </p:txBody>
       </p:sp>
@@ -8241,7 +8122,7 @@
           <a:noFill/>
         </p:spPr>
         <p:txBody>
-          <a:bodyPr wrap="square" lIns="0" rIns="0" tIns="0" bIns="0">
+          <a:bodyPr wrap="square" lIns="0" tIns="0" rIns="0" bIns="0">
             <a:spAutoFit/>
           </a:bodyPr>
           <a:lstStyle/>
@@ -8314,7 +8195,7 @@
           </a:fontRef>
         </p:style>
         <p:txBody>
-          <a:bodyPr rtlCol="0" anchor="ctr" wrap="square" lIns="228600" rIns="228600" tIns="182880" bIns="182880"/>
+          <a:bodyPr wrap="square" lIns="228600" tIns="182880" rIns="228600" bIns="182880" rtlCol="0" anchor="ctr"/>
           <a:lstStyle/>
           <a:p>
             <a:pPr algn="ctr">
@@ -8439,7 +8320,7 @@
         <p:spPr>
           <a:xfrm>
             <a:off x="6217920" y="1691640"/>
-            <a:ext cx="5120640" cy="3931920"/>
+            <a:ext cx="5242560" cy="3931920"/>
           </a:xfrm>
           <a:prstGeom prst="roundRect">
             <a:avLst/>
@@ -8468,7 +8349,7 @@
           </a:fontRef>
         </p:style>
         <p:txBody>
-          <a:bodyPr rtlCol="0" anchor="ctr" wrap="square" lIns="228600" rIns="228600" tIns="182880" bIns="182880"/>
+          <a:bodyPr wrap="square" lIns="228600" tIns="182880" rIns="228600" bIns="182880" rtlCol="0" anchor="ctr"/>
           <a:lstStyle/>
           <a:p>
             <a:pPr algn="ctr">
@@ -8483,8 +8364,14 @@
               </a:defRPr>
             </a:pPr>
             <a:r>
-              <a:t>🪵 費曼的辛辣批判</a:t>
-            </a:r>
+              <a:rPr dirty="0"/>
+              <a:t>🪵 </a:t>
+            </a:r>
+            <a:r>
+              <a:rPr dirty="0" err="1"/>
+              <a:t>費曼的辛辣批判</a:t>
+            </a:r>
+            <a:endParaRPr dirty="0"/>
           </a:p>
           <a:p>
             <a:pPr>
@@ -8499,7 +8386,12 @@
               </a:defRPr>
             </a:pPr>
             <a:r>
-              <a:t>許多實驗報告與專案，就像那副木頭耳機！</a:t>
+              <a:rPr dirty="0" err="1"/>
+              <a:t>許多實驗報告與專案，就像那副木頭耳機</a:t>
+            </a:r>
+            <a:r>
+              <a:rPr dirty="0"/>
+              <a:t>！</a:t>
             </a:r>
           </a:p>
           <a:p>
@@ -8515,8 +8407,14 @@
               </a:defRPr>
             </a:pPr>
             <a:r>
-              <a:t>• 實驗步驟很完整、統計圖表很炫砲</a:t>
-            </a:r>
+              <a:rPr dirty="0"/>
+              <a:t>• </a:t>
+            </a:r>
+            <a:r>
+              <a:rPr dirty="0" err="1"/>
+              <a:t>實驗步驟很完整、統計圖表很炫砲</a:t>
+            </a:r>
+            <a:endParaRPr dirty="0"/>
           </a:p>
           <a:p>
             <a:pPr>
@@ -8531,8 +8429,14 @@
               </a:defRPr>
             </a:pPr>
             <a:r>
-              <a:t>• 引用大量權威論文與高深專有名詞</a:t>
-            </a:r>
+              <a:rPr dirty="0"/>
+              <a:t>• </a:t>
+            </a:r>
+            <a:r>
+              <a:rPr dirty="0" err="1"/>
+              <a:t>引用大量權威論文與高深專有名詞</a:t>
+            </a:r>
+            <a:endParaRPr dirty="0"/>
           </a:p>
           <a:p>
             <a:pPr>
@@ -8547,8 +8451,18 @@
               </a:defRPr>
             </a:pPr>
             <a:r>
-              <a:t>• 表面外觀形式做足了 100 分</a:t>
-            </a:r>
+              <a:rPr dirty="0"/>
+              <a:t>• </a:t>
+            </a:r>
+            <a:r>
+              <a:rPr dirty="0" err="1"/>
+              <a:t>表面外觀形式做足了</a:t>
+            </a:r>
+            <a:r>
+              <a:rPr dirty="0"/>
+              <a:t> 100 分</a:t>
+            </a:r>
+            <a:endParaRPr lang="en-US" dirty="0"/>
           </a:p>
           <a:p>
             <a:pPr>
@@ -8563,7 +8477,106 @@
               </a:defRPr>
             </a:pPr>
             <a:r>
-              <a:t>⚠️ 底層卻徹底喪失了【科學誠實】！</a:t>
+              <a:rPr lang="zh-TW" altLang="en-US" dirty="0">
+                <a:solidFill>
+                  <a:srgbClr val="FFF2CC"/>
+                </a:solidFill>
+              </a:rPr>
+              <a:t>底層卻徹底喪失了</a:t>
+            </a:r>
+            <a:r>
+              <a:rPr lang="en-US" altLang="zh-TW" dirty="0">
+                <a:solidFill>
+                  <a:srgbClr val="FFF2CC"/>
+                </a:solidFill>
+              </a:rPr>
+              <a:t>【</a:t>
+            </a:r>
+            <a:r>
+              <a:rPr lang="zh-TW" altLang="en-US" dirty="0">
+                <a:solidFill>
+                  <a:srgbClr val="FFF2CC"/>
+                </a:solidFill>
+              </a:rPr>
+              <a:t>科學誠實</a:t>
+            </a:r>
+            <a:r>
+              <a:rPr lang="en-US" altLang="zh-TW" dirty="0">
+                <a:solidFill>
+                  <a:srgbClr val="FFF2CC"/>
+                </a:solidFill>
+              </a:rPr>
+              <a:t>】</a:t>
+            </a:r>
+            <a:r>
+              <a:rPr lang="zh-TW" altLang="en-US" dirty="0">
+                <a:solidFill>
+                  <a:srgbClr val="FFF2CC"/>
+                </a:solidFill>
+              </a:rPr>
+              <a:t>！</a:t>
+            </a:r>
+          </a:p>
+        </p:txBody>
+      </p:sp>
+      <p:sp>
+        <p:nvSpPr>
+          <p:cNvPr id="7" name="文字方塊 6">
+            <a:extLst>
+              <a:ext uri="{FF2B5EF4-FFF2-40B4-BE49-F238E27FC236}">
+                <a16:creationId xmlns:a16="http://schemas.microsoft.com/office/drawing/2014/main" id="{64875678-6513-6D6A-63C5-1B54E07470E7}"/>
+              </a:ext>
+            </a:extLst>
+          </p:cNvPr>
+          <p:cNvSpPr txBox="1"/>
+          <p:nvPr/>
+        </p:nvSpPr>
+        <p:spPr>
+          <a:xfrm>
+            <a:off x="6316243" y="4704695"/>
+            <a:ext cx="6145160" cy="461665"/>
+          </a:xfrm>
+          <a:prstGeom prst="rect">
+            <a:avLst/>
+          </a:prstGeom>
+          <a:noFill/>
+        </p:spPr>
+        <p:txBody>
+          <a:bodyPr wrap="square">
+            <a:spAutoFit/>
+          </a:bodyPr>
+          <a:lstStyle/>
+          <a:p>
+            <a:pPr>
+              <a:spcBef>
+                <a:spcPts val="1000"/>
+              </a:spcBef>
+              <a:defRPr sz="2400" b="1">
+                <a:solidFill>
+                  <a:srgbClr val="C5221F"/>
+                </a:solidFill>
+                <a:latin typeface="Microsoft JhengHei"/>
+              </a:defRPr>
+            </a:pPr>
+            <a:r>
+              <a:rPr lang="zh-TW" altLang="en-US" dirty="0"/>
+              <a:t>⚠️ 底層卻徹底喪失了</a:t>
+            </a:r>
+            <a:r>
+              <a:rPr lang="en-US" altLang="zh-TW" dirty="0"/>
+              <a:t>【</a:t>
+            </a:r>
+            <a:r>
+              <a:rPr lang="zh-TW" altLang="en-US" dirty="0"/>
+              <a:t>科學誠實</a:t>
+            </a:r>
+            <a:r>
+              <a:rPr lang="en-US" altLang="zh-TW" dirty="0"/>
+              <a:t>】</a:t>
+            </a:r>
+            <a:r>
+              <a:rPr lang="zh-TW" altLang="en-US" dirty="0"/>
+              <a:t>！</a:t>
             </a:r>
           </a:p>
         </p:txBody>
@@ -8577,7 +8590,7 @@
 </file>
 
 <file path=ppt/slides/slide8.xml><?xml version="1.0" encoding="utf-8"?>
-<p:sld xmlns:a="http://schemas.openxmlformats.org/drawingml/2006/main" xmlns:p="http://schemas.openxmlformats.org/presentationml/2006/main" xmlns:r="http://schemas.openxmlformats.org/officeDocument/2006/relationships">
+<p:sld xmlns:a="http://schemas.openxmlformats.org/drawingml/2006/main" xmlns:r="http://schemas.openxmlformats.org/officeDocument/2006/relationships" xmlns:p="http://schemas.openxmlformats.org/presentationml/2006/main">
   <p:cSld>
     <p:spTree>
       <p:nvGrpSpPr>
@@ -8585,7 +8598,14 @@
         <p:cNvGrpSpPr/>
         <p:nvPr/>
       </p:nvGrpSpPr>
-      <p:grpSpPr/>
+      <p:grpSpPr>
+        <a:xfrm>
+          <a:off x="0" y="0"/>
+          <a:ext cx="0" cy="0"/>
+          <a:chOff x="0" y="0"/>
+          <a:chExt cx="0" cy="0"/>
+        </a:xfrm>
+      </p:grpSpPr>
       <p:sp>
         <p:nvSpPr>
           <p:cNvPr id="2" name="Rectangle 1"/>
@@ -8626,6 +8646,7 @@
           <a:lstStyle/>
           <a:p>
             <a:pPr algn="ctr"/>
+            <a:endParaRPr/>
           </a:p>
         </p:txBody>
       </p:sp>
@@ -8646,7 +8667,7 @@
           <a:noFill/>
         </p:spPr>
         <p:txBody>
-          <a:bodyPr wrap="square" lIns="0" rIns="0" tIns="0" bIns="0">
+          <a:bodyPr wrap="square" lIns="0" tIns="0" rIns="0" bIns="0">
             <a:spAutoFit/>
           </a:bodyPr>
           <a:lstStyle/>
@@ -8719,7 +8740,7 @@
           </a:fontRef>
         </p:style>
         <p:txBody>
-          <a:bodyPr rtlCol="0" anchor="ctr" wrap="square" lIns="228600" rIns="228600" tIns="182880" bIns="182880"/>
+          <a:bodyPr wrap="square" lIns="228600" tIns="182880" rIns="228600" bIns="182880" rtlCol="0" anchor="ctr"/>
           <a:lstStyle/>
           <a:p>
             <a:pPr algn="ctr">
@@ -8848,7 +8869,7 @@
           </a:fontRef>
         </p:style>
         <p:txBody>
-          <a:bodyPr rtlCol="0" anchor="ctr" wrap="square" lIns="228600" rIns="228600" tIns="182880" bIns="182880"/>
+          <a:bodyPr wrap="square" lIns="228600" tIns="182880" rIns="228600" bIns="182880" rtlCol="0" anchor="ctr"/>
           <a:lstStyle/>
           <a:p>
             <a:pPr algn="ctr">
@@ -8890,7 +8911,7 @@
 </file>
 
 <file path=ppt/slides/slide9.xml><?xml version="1.0" encoding="utf-8"?>
-<p:sld xmlns:a="http://schemas.openxmlformats.org/drawingml/2006/main" xmlns:p="http://schemas.openxmlformats.org/presentationml/2006/main" xmlns:r="http://schemas.openxmlformats.org/officeDocument/2006/relationships">
+<p:sld xmlns:a="http://schemas.openxmlformats.org/drawingml/2006/main" xmlns:r="http://schemas.openxmlformats.org/officeDocument/2006/relationships" xmlns:p="http://schemas.openxmlformats.org/presentationml/2006/main">
   <p:cSld>
     <p:spTree>
       <p:nvGrpSpPr>
@@ -8898,7 +8919,14 @@
         <p:cNvGrpSpPr/>
         <p:nvPr/>
       </p:nvGrpSpPr>
-      <p:grpSpPr/>
+      <p:grpSpPr>
+        <a:xfrm>
+          <a:off x="0" y="0"/>
+          <a:ext cx="0" cy="0"/>
+          <a:chOff x="0" y="0"/>
+          <a:chExt cx="0" cy="0"/>
+        </a:xfrm>
+      </p:grpSpPr>
       <p:sp>
         <p:nvSpPr>
           <p:cNvPr id="2" name="Rectangle 1"/>
@@ -8939,6 +8967,7 @@
           <a:lstStyle/>
           <a:p>
             <a:pPr algn="ctr"/>
+            <a:endParaRPr/>
           </a:p>
         </p:txBody>
       </p:sp>
@@ -8959,7 +8988,7 @@
           <a:noFill/>
         </p:spPr>
         <p:txBody>
-          <a:bodyPr wrap="square" lIns="0" rIns="0" tIns="0" bIns="0">
+          <a:bodyPr wrap="square" lIns="0" tIns="0" rIns="0" bIns="0">
             <a:spAutoFit/>
           </a:bodyPr>
           <a:lstStyle/>
@@ -9032,7 +9061,7 @@
           </a:fontRef>
         </p:style>
         <p:txBody>
-          <a:bodyPr rtlCol="0" anchor="ctr" wrap="square" lIns="228600" rIns="228600" tIns="182880" bIns="182880"/>
+          <a:bodyPr wrap="square" lIns="228600" tIns="182880" rIns="228600" bIns="182880" rtlCol="0" anchor="ctr"/>
           <a:lstStyle/>
           <a:p>
             <a:pPr algn="ctr">
@@ -9154,7 +9183,7 @@
           </a:fontRef>
         </p:style>
         <p:txBody>
-          <a:bodyPr rtlCol="0" anchor="ctr" wrap="square" lIns="228600" rIns="228600" tIns="182880" bIns="182880"/>
+          <a:bodyPr wrap="square" lIns="228600" tIns="182880" rIns="228600" bIns="182880" rtlCol="0" anchor="ctr"/>
           <a:lstStyle/>
           <a:p>
             <a:pPr algn="ctr">
@@ -9169,8 +9198,34 @@
               </a:defRPr>
             </a:pPr>
             <a:r>
-              <a:t>✅ 正統探究（科學誠實姿態）</a:t>
-            </a:r>
+              <a:rPr dirty="0" err="1">
+                <a:solidFill>
+                  <a:srgbClr val="E1EFD8"/>
+                </a:solidFill>
+              </a:rPr>
+              <a:t>正統探究（科學誠實姿態</a:t>
+            </a:r>
+            <a:r>
+              <a:rPr dirty="0">
+                <a:solidFill>
+                  <a:srgbClr val="E1EFD8"/>
+                </a:solidFill>
+              </a:rPr>
+              <a:t>）</a:t>
+            </a:r>
+            <a:r>
+              <a:rPr lang="en-US" altLang="zh-TW" dirty="0">
+                <a:solidFill>
+                  <a:srgbClr val="E1EFD8"/>
+                </a:solidFill>
+              </a:rPr>
+              <a:t>))</a:t>
+            </a:r>
+            <a:endParaRPr dirty="0">
+              <a:solidFill>
+                <a:srgbClr val="E1EFD8"/>
+              </a:solidFill>
+            </a:endParaRPr>
           </a:p>
           <a:p>
             <a:pPr>
@@ -9185,7 +9240,16 @@
               </a:defRPr>
             </a:pPr>
             <a:r>
-              <a:t>• 保留異常：離群點往往隱藏未控制的關鍵變因！</a:t>
+              <a:rPr dirty="0"/>
+              <a:t>• </a:t>
+            </a:r>
+            <a:r>
+              <a:rPr dirty="0" err="1"/>
+              <a:t>保留異常：離群點往往隱藏未控制的關鍵變因</a:t>
+            </a:r>
+            <a:r>
+              <a:rPr dirty="0"/>
+              <a:t>！</a:t>
             </a:r>
           </a:p>
           <a:p>
@@ -9201,8 +9265,14 @@
               </a:defRPr>
             </a:pPr>
             <a:r>
-              <a:t>• 誠實面對假說破產：證明此路不通也是大貢獻</a:t>
-            </a:r>
+              <a:rPr dirty="0"/>
+              <a:t>• </a:t>
+            </a:r>
+            <a:r>
+              <a:rPr dirty="0" err="1"/>
+              <a:t>誠實面對假說破產：證明此路不通也是大貢獻</a:t>
+            </a:r>
+            <a:endParaRPr dirty="0"/>
           </a:p>
           <a:p>
             <a:pPr>
@@ -9217,8 +9287,14 @@
               </a:defRPr>
             </a:pPr>
             <a:r>
-              <a:t>• 公開限制：主動把儀器誤差與局限攤在陽光下</a:t>
-            </a:r>
+              <a:rPr dirty="0"/>
+              <a:t>• </a:t>
+            </a:r>
+            <a:r>
+              <a:rPr dirty="0" err="1"/>
+              <a:t>公開限制：主動把儀器誤差與局限攤在陽光下</a:t>
+            </a:r>
+            <a:endParaRPr dirty="0"/>
           </a:p>
           <a:p>
             <a:pPr>
@@ -9233,7 +9309,59 @@
               </a:defRPr>
             </a:pPr>
             <a:r>
-              <a:t>• 絕不自欺：寧交有瑕疵的真數據，不交美化贗品</a:t>
+              <a:rPr dirty="0"/>
+              <a:t>• </a:t>
+            </a:r>
+            <a:r>
+              <a:rPr dirty="0" err="1"/>
+              <a:t>絕不自欺：寧交有瑕疵的真數據，不交美化贗品</a:t>
+            </a:r>
+            <a:endParaRPr dirty="0"/>
+          </a:p>
+        </p:txBody>
+      </p:sp>
+      <p:sp>
+        <p:nvSpPr>
+          <p:cNvPr id="7" name="文字方塊 6">
+            <a:extLst>
+              <a:ext uri="{FF2B5EF4-FFF2-40B4-BE49-F238E27FC236}">
+                <a16:creationId xmlns:a16="http://schemas.microsoft.com/office/drawing/2014/main" id="{1230AC1F-732B-F6B6-82E6-E6141A233A74}"/>
+              </a:ext>
+            </a:extLst>
+          </p:cNvPr>
+          <p:cNvSpPr txBox="1"/>
+          <p:nvPr/>
+        </p:nvSpPr>
+        <p:spPr>
+          <a:xfrm>
+            <a:off x="5705660" y="1791509"/>
+            <a:ext cx="6145160" cy="492443"/>
+          </a:xfrm>
+          <a:prstGeom prst="rect">
+            <a:avLst/>
+          </a:prstGeom>
+          <a:noFill/>
+        </p:spPr>
+        <p:txBody>
+          <a:bodyPr wrap="square">
+            <a:spAutoFit/>
+          </a:bodyPr>
+          <a:lstStyle/>
+          <a:p>
+            <a:pPr algn="ctr">
+              <a:spcAft>
+                <a:spcPts val="1400"/>
+              </a:spcAft>
+              <a:defRPr sz="2600" b="1">
+                <a:solidFill>
+                  <a:srgbClr val="1E7E34"/>
+                </a:solidFill>
+                <a:latin typeface="Microsoft JhengHei"/>
+              </a:defRPr>
+            </a:pPr>
+            <a:r>
+              <a:rPr lang="zh-TW" altLang="en-US" dirty="0"/>
+              <a:t>✅ 正統探究（科學誠實姿態）</a:t>
             </a:r>
           </a:p>
         </p:txBody>
@@ -9567,7 +9695,7 @@
 </file>
 
 <file path=ppt/theme/theme2.xml><?xml version="1.0" encoding="utf-8"?>
-<a:theme xmlns:a="http://schemas.openxmlformats.org/drawingml/2006/main" name="Office Theme">
+<a:theme xmlns:a="http://schemas.openxmlformats.org/drawingml/2006/main" name="Office 佈景主題">
   <a:themeElements>
     <a:clrScheme name="Office">
       <a:dk1>
@@ -9577,44 +9705,44 @@
         <a:sysClr val="window" lastClr="FFFFFF"/>
       </a:lt1>
       <a:dk2>
-        <a:srgbClr val="1F497D"/>
+        <a:srgbClr val="0E2841"/>
       </a:dk2>
       <a:lt2>
-        <a:srgbClr val="EEECE1"/>
+        <a:srgbClr val="E8E8E8"/>
       </a:lt2>
       <a:accent1>
-        <a:srgbClr val="4F81BD"/>
+        <a:srgbClr val="156082"/>
       </a:accent1>
       <a:accent2>
-        <a:srgbClr val="C0504D"/>
+        <a:srgbClr val="E97132"/>
       </a:accent2>
       <a:accent3>
-        <a:srgbClr val="9BBB59"/>
+        <a:srgbClr val="196B24"/>
       </a:accent3>
       <a:accent4>
-        <a:srgbClr val="8064A2"/>
+        <a:srgbClr val="0F9ED5"/>
       </a:accent4>
       <a:accent5>
-        <a:srgbClr val="4BACC6"/>
+        <a:srgbClr val="A02B93"/>
       </a:accent5>
       <a:accent6>
-        <a:srgbClr val="F79646"/>
+        <a:srgbClr val="4EA72E"/>
       </a:accent6>
       <a:hlink>
-        <a:srgbClr val="0000FF"/>
+        <a:srgbClr val="467886"/>
       </a:hlink>
       <a:folHlink>
-        <a:srgbClr val="800080"/>
+        <a:srgbClr val="96607D"/>
       </a:folHlink>
     </a:clrScheme>
     <a:fontScheme name="Office">
       <a:majorFont>
-        <a:latin typeface="Calibri"/>
+        <a:latin typeface="Aptos Display" panose="02110004020202020204"/>
         <a:ea typeface=""/>
         <a:cs typeface=""/>
-        <a:font script="Jpan" typeface="ＭＳ Ｐゴシック"/>
+        <a:font script="Jpan" typeface="游ゴシック Light"/>
         <a:font script="Hang" typeface="맑은 고딕"/>
-        <a:font script="Hans" typeface="宋体"/>
+        <a:font script="Hans" typeface="等线 Light"/>
         <a:font script="Hant" typeface="新細明體"/>
         <a:font script="Arab" typeface="Times New Roman"/>
         <a:font script="Hebr" typeface="Times New Roman"/>
@@ -9642,14 +9770,31 @@
         <a:font script="Viet" typeface="Times New Roman"/>
         <a:font script="Uigh" typeface="Microsoft Uighur"/>
         <a:font script="Geor" typeface="Sylfaen"/>
+        <a:font script="Armn" typeface="Arial"/>
+        <a:font script="Bugi" typeface="Leelawadee UI"/>
+        <a:font script="Bopo" typeface="Microsoft JhengHei"/>
+        <a:font script="Java" typeface="Javanese Text"/>
+        <a:font script="Lisu" typeface="Segoe UI"/>
+        <a:font script="Mymr" typeface="Myanmar Text"/>
+        <a:font script="Nkoo" typeface="Ebrima"/>
+        <a:font script="Olck" typeface="Nirmala UI"/>
+        <a:font script="Osma" typeface="Ebrima"/>
+        <a:font script="Phag" typeface="Phagspa"/>
+        <a:font script="Syrn" typeface="Estrangelo Edessa"/>
+        <a:font script="Syrj" typeface="Estrangelo Edessa"/>
+        <a:font script="Syre" typeface="Estrangelo Edessa"/>
+        <a:font script="Sora" typeface="Nirmala UI"/>
+        <a:font script="Tale" typeface="Microsoft Tai Le"/>
+        <a:font script="Talu" typeface="Microsoft New Tai Lue"/>
+        <a:font script="Tfng" typeface="Ebrima"/>
       </a:majorFont>
       <a:minorFont>
-        <a:latin typeface="Calibri"/>
+        <a:latin typeface="Aptos" panose="02110004020202020204"/>
         <a:ea typeface=""/>
         <a:cs typeface=""/>
-        <a:font script="Jpan" typeface="ＭＳ Ｐゴシック"/>
+        <a:font script="Jpan" typeface="游ゴシック"/>
         <a:font script="Hang" typeface="맑은 고딕"/>
-        <a:font script="Hans" typeface="宋体"/>
+        <a:font script="Hans" typeface="等线"/>
         <a:font script="Hant" typeface="新細明體"/>
         <a:font script="Arab" typeface="Arial"/>
         <a:font script="Hebr" typeface="Arial"/>
@@ -9677,6 +9822,23 @@
         <a:font script="Viet" typeface="Arial"/>
         <a:font script="Uigh" typeface="Microsoft Uighur"/>
         <a:font script="Geor" typeface="Sylfaen"/>
+        <a:font script="Armn" typeface="Arial"/>
+        <a:font script="Bugi" typeface="Leelawadee UI"/>
+        <a:font script="Bopo" typeface="Microsoft JhengHei"/>
+        <a:font script="Java" typeface="Javanese Text"/>
+        <a:font script="Lisu" typeface="Segoe UI"/>
+        <a:font script="Mymr" typeface="Myanmar Text"/>
+        <a:font script="Nkoo" typeface="Ebrima"/>
+        <a:font script="Olck" typeface="Nirmala UI"/>
+        <a:font script="Osma" typeface="Ebrima"/>
+        <a:font script="Phag" typeface="Phagspa"/>
+        <a:font script="Syrn" typeface="Estrangelo Edessa"/>
+        <a:font script="Syrj" typeface="Estrangelo Edessa"/>
+        <a:font script="Syre" typeface="Estrangelo Edessa"/>
+        <a:font script="Sora" typeface="Nirmala UI"/>
+        <a:font script="Tale" typeface="Microsoft Tai Le"/>
+        <a:font script="Talu" typeface="Microsoft New Tai Lue"/>
+        <a:font script="Tfng" typeface="Ebrima"/>
       </a:minorFont>
     </a:fontScheme>
     <a:fmtScheme name="Office">
@@ -9688,180 +9850,136 @@
           <a:gsLst>
             <a:gs pos="0">
               <a:schemeClr val="phClr">
-                <a:tint val="50000"/>
-                <a:satMod val="300000"/>
+                <a:lumMod val="110000"/>
+                <a:satMod val="105000"/>
+                <a:tint val="67000"/>
               </a:schemeClr>
             </a:gs>
-            <a:gs pos="35000">
+            <a:gs pos="50000">
               <a:schemeClr val="phClr">
-                <a:tint val="37000"/>
-                <a:satMod val="300000"/>
+                <a:lumMod val="105000"/>
+                <a:satMod val="103000"/>
+                <a:tint val="73000"/>
               </a:schemeClr>
             </a:gs>
             <a:gs pos="100000">
               <a:schemeClr val="phClr">
-                <a:tint val="15000"/>
-                <a:satMod val="350000"/>
+                <a:lumMod val="105000"/>
+                <a:satMod val="109000"/>
+                <a:tint val="81000"/>
               </a:schemeClr>
             </a:gs>
           </a:gsLst>
-          <a:lin ang="16200000" scaled="1"/>
+          <a:lin ang="5400000" scaled="0"/>
         </a:gradFill>
         <a:gradFill rotWithShape="1">
           <a:gsLst>
             <a:gs pos="0">
               <a:schemeClr val="phClr">
-                <a:tint val="100000"/>
+                <a:satMod val="103000"/>
+                <a:lumMod val="102000"/>
+                <a:tint val="94000"/>
+              </a:schemeClr>
+            </a:gs>
+            <a:gs pos="50000">
+              <a:schemeClr val="phClr">
+                <a:satMod val="110000"/>
+                <a:lumMod val="100000"/>
                 <a:shade val="100000"/>
-                <a:satMod val="130000"/>
               </a:schemeClr>
             </a:gs>
             <a:gs pos="100000">
               <a:schemeClr val="phClr">
-                <a:tint val="50000"/>
-                <a:shade val="100000"/>
-                <a:satMod val="350000"/>
+                <a:lumMod val="99000"/>
+                <a:satMod val="120000"/>
+                <a:shade val="78000"/>
               </a:schemeClr>
             </a:gs>
           </a:gsLst>
-          <a:lin ang="16200000" scaled="0"/>
+          <a:lin ang="5400000" scaled="0"/>
         </a:gradFill>
       </a:fillStyleLst>
       <a:lnStyleLst>
-        <a:ln w="9525" cap="flat" cmpd="sng" algn="ctr">
+        <a:ln w="12700" cap="flat" cmpd="sng" algn="ctr">
           <a:solidFill>
-            <a:schemeClr val="phClr">
-              <a:shade val="95000"/>
-              <a:satMod val="105000"/>
-            </a:schemeClr>
+            <a:schemeClr val="phClr"/>
           </a:solidFill>
           <a:prstDash val="solid"/>
+          <a:miter lim="800000"/>
+        </a:ln>
+        <a:ln w="19050" cap="flat" cmpd="sng" algn="ctr">
+          <a:solidFill>
+            <a:schemeClr val="phClr"/>
+          </a:solidFill>
+          <a:prstDash val="solid"/>
+          <a:miter lim="800000"/>
         </a:ln>
         <a:ln w="25400" cap="flat" cmpd="sng" algn="ctr">
           <a:solidFill>
             <a:schemeClr val="phClr"/>
           </a:solidFill>
           <a:prstDash val="solid"/>
-        </a:ln>
-        <a:ln w="38100" cap="flat" cmpd="sng" algn="ctr">
-          <a:solidFill>
-            <a:schemeClr val="phClr"/>
-          </a:solidFill>
-          <a:prstDash val="solid"/>
+          <a:miter lim="800000"/>
         </a:ln>
       </a:lnStyleLst>
       <a:effectStyleLst>
         <a:effectStyle>
+          <a:effectLst/>
+        </a:effectStyle>
+        <a:effectStyle>
+          <a:effectLst/>
+        </a:effectStyle>
+        <a:effectStyle>
           <a:effectLst>
-            <a:outerShdw blurRad="40000" dist="20000" dir="5400000" rotWithShape="0">
+            <a:outerShdw blurRad="57150" dist="19050" dir="5400000" algn="ctr" rotWithShape="0">
               <a:srgbClr val="000000">
-                <a:alpha val="38000"/>
+                <a:alpha val="63000"/>
               </a:srgbClr>
             </a:outerShdw>
           </a:effectLst>
-        </a:effectStyle>
-        <a:effectStyle>
-          <a:effectLst>
-            <a:outerShdw blurRad="40000" dist="23000" dir="5400000" rotWithShape="0">
-              <a:srgbClr val="000000">
-                <a:alpha val="35000"/>
-              </a:srgbClr>
-            </a:outerShdw>
-          </a:effectLst>
-        </a:effectStyle>
-        <a:effectStyle>
-          <a:effectLst>
-            <a:outerShdw blurRad="40000" dist="23000" dir="5400000" rotWithShape="0">
-              <a:srgbClr val="000000">
-                <a:alpha val="35000"/>
-              </a:srgbClr>
-            </a:outerShdw>
-          </a:effectLst>
-          <a:scene3d>
-            <a:camera prst="orthographicFront">
-              <a:rot lat="0" lon="0" rev="0"/>
-            </a:camera>
-            <a:lightRig rig="threePt" dir="t">
-              <a:rot lat="0" lon="0" rev="1200000"/>
-            </a:lightRig>
-          </a:scene3d>
-          <a:sp3d>
-            <a:bevelT w="63500" h="25400"/>
-          </a:sp3d>
         </a:effectStyle>
       </a:effectStyleLst>
       <a:bgFillStyleLst>
         <a:solidFill>
           <a:schemeClr val="phClr"/>
         </a:solidFill>
+        <a:solidFill>
+          <a:schemeClr val="phClr">
+            <a:tint val="95000"/>
+            <a:satMod val="170000"/>
+          </a:schemeClr>
+        </a:solidFill>
         <a:gradFill rotWithShape="1">
           <a:gsLst>
             <a:gs pos="0">
               <a:schemeClr val="phClr">
-                <a:tint val="40000"/>
-                <a:satMod val="350000"/>
+                <a:tint val="93000"/>
+                <a:satMod val="150000"/>
+                <a:shade val="98000"/>
+                <a:lumMod val="102000"/>
               </a:schemeClr>
             </a:gs>
-            <a:gs pos="40000">
+            <a:gs pos="50000">
               <a:schemeClr val="phClr">
-                <a:tint val="45000"/>
-                <a:shade val="99000"/>
-                <a:satMod val="350000"/>
+                <a:tint val="98000"/>
+                <a:satMod val="130000"/>
+                <a:shade val="90000"/>
+                <a:lumMod val="103000"/>
               </a:schemeClr>
             </a:gs>
             <a:gs pos="100000">
               <a:schemeClr val="phClr">
-                <a:shade val="20000"/>
-                <a:satMod val="255000"/>
+                <a:shade val="63000"/>
+                <a:satMod val="120000"/>
               </a:schemeClr>
             </a:gs>
           </a:gsLst>
-          <a:path path="circle">
-            <a:fillToRect l="50000" t="-80000" r="50000" b="180000"/>
-          </a:path>
-        </a:gradFill>
-        <a:gradFill rotWithShape="1">
-          <a:gsLst>
-            <a:gs pos="0">
-              <a:schemeClr val="phClr">
-                <a:tint val="80000"/>
-                <a:satMod val="300000"/>
-              </a:schemeClr>
-            </a:gs>
-            <a:gs pos="100000">
-              <a:schemeClr val="phClr">
-                <a:shade val="30000"/>
-                <a:satMod val="200000"/>
-              </a:schemeClr>
-            </a:gs>
-          </a:gsLst>
-          <a:path path="circle">
-            <a:fillToRect l="50000" t="50000" r="50000" b="50000"/>
-          </a:path>
+          <a:lin ang="5400000" scaled="0"/>
         </a:gradFill>
       </a:bgFillStyleLst>
     </a:fmtScheme>
   </a:themeElements>
   <a:objectDefaults>
-    <a:spDef>
-      <a:spPr/>
-      <a:bodyPr/>
-      <a:lstStyle/>
-      <a:style>
-        <a:lnRef idx="1">
-          <a:schemeClr val="accent1"/>
-        </a:lnRef>
-        <a:fillRef idx="3">
-          <a:schemeClr val="accent1"/>
-        </a:fillRef>
-        <a:effectRef idx="2">
-          <a:schemeClr val="accent1"/>
-        </a:effectRef>
-        <a:fontRef idx="minor">
-          <a:schemeClr val="lt1"/>
-        </a:fontRef>
-      </a:style>
-    </a:spDef>
     <a:lnDef>
       <a:spPr/>
       <a:bodyPr/>
@@ -9883,5 +10001,10 @@
     </a:lnDef>
   </a:objectDefaults>
   <a:extraClrSchemeLst/>
+  <a:extLst>
+    <a:ext uri="{05A4C25C-085E-4340-85A3-A5531E510DB2}">
+      <thm15:themeFamily xmlns:thm15="http://schemas.microsoft.com/office/thememl/2012/main" name="Office Theme" id="{2E142A2C-CD16-42D6-873A-C26D2A0506FA}" vid="{1BDDFF52-6CD6-40A5-AB3C-68EB2F1E4D0A}"/>
+    </a:ext>
+  </a:extLst>
 </a:theme>
 </file>